--- a/AsiaGo_Pass_Presentation1_enhanced.pptx
+++ b/AsiaGo_Pass_Presentation1_enhanced.pptx
@@ -15224,7 +15224,7 @@
       </p:grpSpPr>
       <p:sp>
         <p:nvSpPr>
-          <p:cNvPr id="11" name="hero"/>
+          <p:cNvPr id="11" name="r"/>
           <p:cNvSpPr/>
           <p:nvPr/>
         </p:nvSpPr>
@@ -15250,7 +15250,6 @@
             </a:gsLst>
             <a:lin ang="2700000" scaled="1"/>
           </a:gradFill>
-          <a:ln/>
         </p:spPr>
         <p:txBody>
           <a:bodyPr/>
@@ -15275,7 +15274,6 @@
             <a:avLst/>
           </a:prstGeom>
           <a:noFill/>
-          <a:ln/>
         </p:spPr>
         <p:txBody>
           <a:bodyPr wrap="square" lIns="0" tIns="0" rIns="0" bIns="0" rtlCol="0" anchor="t"/>
@@ -15312,7 +15310,6 @@
             <a:avLst/>
           </a:prstGeom>
           <a:noFill/>
-          <a:ln/>
         </p:spPr>
         <p:txBody>
           <a:bodyPr wrap="square" lIns="0" tIns="0" rIns="0" bIns="0" rtlCol="0" anchor="t"/>
@@ -15352,7 +15349,6 @@
             <a:avLst/>
           </a:prstGeom>
           <a:noFill/>
-          <a:ln/>
         </p:spPr>
         <p:txBody>
           <a:bodyPr wrap="square" lIns="0" tIns="0" rIns="0" bIns="0" rtlCol="0" anchor="t"/>
@@ -15643,7 +15639,7 @@
       </p:sp>
       <p:sp>
         <p:nvSpPr>
-          <p:cNvPr id="18" name="strip"/>
+          <p:cNvPr id="18" name="r"/>
           <p:cNvSpPr/>
           <p:nvPr/>
         </p:nvSpPr>
@@ -15658,7 +15654,6 @@
           <a:solidFill>
             <a:srgbClr val="BA7517"/>
           </a:solidFill>
-          <a:ln/>
         </p:spPr>
         <p:txBody>
           <a:bodyPr/>
@@ -15683,7 +15678,6 @@
             <a:avLst/>
           </a:prstGeom>
           <a:noFill/>
-          <a:ln/>
         </p:spPr>
         <p:txBody>
           <a:bodyPr wrap="square" lIns="0" tIns="0" rIns="0" bIns="0" rtlCol="0" anchor="t"/>
@@ -15707,7 +15701,7 @@
       </p:sp>
       <p:sp>
         <p:nvSpPr>
-          <p:cNvPr id="20" name="strip"/>
+          <p:cNvPr id="20" name="r"/>
           <p:cNvSpPr/>
           <p:nvPr/>
         </p:nvSpPr>
@@ -15722,7 +15716,6 @@
           <a:solidFill>
             <a:srgbClr val="BA7517"/>
           </a:solidFill>
-          <a:ln/>
         </p:spPr>
         <p:txBody>
           <a:bodyPr/>
@@ -15747,7 +15740,6 @@
             <a:avLst/>
           </a:prstGeom>
           <a:noFill/>
-          <a:ln/>
         </p:spPr>
         <p:txBody>
           <a:bodyPr wrap="square" lIns="0" tIns="0" rIns="0" bIns="0" rtlCol="0" anchor="t"/>
@@ -15784,7 +15776,6 @@
             <a:avLst/>
           </a:prstGeom>
           <a:noFill/>
-          <a:ln/>
         </p:spPr>
         <p:txBody>
           <a:bodyPr wrap="square" lIns="0" tIns="0" rIns="0" bIns="0" rtlCol="0" anchor="t"/>
@@ -15981,7 +15972,6 @@
             <a:avLst/>
           </a:prstGeom>
           <a:noFill/>
-          <a:ln/>
         </p:spPr>
         <p:txBody>
           <a:bodyPr wrap="square" lIns="0" tIns="0" rIns="0" bIns="0" rtlCol="0" anchor="t"/>
@@ -16210,7 +16200,6 @@
             <a:avLst/>
           </a:prstGeom>
           <a:noFill/>
-          <a:ln/>
         </p:spPr>
         <p:txBody>
           <a:bodyPr wrap="square" lIns="0" tIns="0" rIns="0" bIns="0" rtlCol="0" anchor="t"/>
@@ -16247,7 +16236,6 @@
             <a:avLst/>
           </a:prstGeom>
           <a:noFill/>
-          <a:ln/>
         </p:spPr>
         <p:txBody>
           <a:bodyPr wrap="square" lIns="0" tIns="0" rIns="0" bIns="0" rtlCol="0" anchor="t"/>
@@ -16304,7 +16292,7 @@
       </p:grpSpPr>
       <p:sp>
         <p:nvSpPr>
-          <p:cNvPr id="11" name="hero"/>
+          <p:cNvPr id="11" name="r"/>
           <p:cNvSpPr/>
           <p:nvPr/>
         </p:nvSpPr>
@@ -16330,7 +16318,6 @@
             </a:gsLst>
             <a:lin ang="2700000" scaled="1"/>
           </a:gradFill>
-          <a:ln/>
         </p:spPr>
         <p:txBody>
           <a:bodyPr/>
@@ -16355,7 +16342,6 @@
             <a:avLst/>
           </a:prstGeom>
           <a:noFill/>
-          <a:ln/>
         </p:spPr>
         <p:txBody>
           <a:bodyPr wrap="square" lIns="0" tIns="0" rIns="0" bIns="0" rtlCol="0" anchor="t"/>
@@ -16392,7 +16378,6 @@
             <a:avLst/>
           </a:prstGeom>
           <a:noFill/>
-          <a:ln/>
         </p:spPr>
         <p:txBody>
           <a:bodyPr wrap="square" lIns="0" tIns="0" rIns="0" bIns="0" rtlCol="0" anchor="t"/>
@@ -16432,7 +16417,6 @@
             <a:avLst/>
           </a:prstGeom>
           <a:noFill/>
-          <a:ln/>
         </p:spPr>
         <p:txBody>
           <a:bodyPr wrap="square" lIns="0" tIns="0" rIns="0" bIns="0" rtlCol="0" anchor="t"/>
@@ -16723,7 +16707,7 @@
       </p:sp>
       <p:sp>
         <p:nvSpPr>
-          <p:cNvPr id="18" name="strip"/>
+          <p:cNvPr id="18" name="r"/>
           <p:cNvSpPr/>
           <p:nvPr/>
         </p:nvSpPr>
@@ -16738,7 +16722,6 @@
           <a:solidFill>
             <a:srgbClr val="185FA5"/>
           </a:solidFill>
-          <a:ln/>
         </p:spPr>
         <p:txBody>
           <a:bodyPr/>
@@ -16763,7 +16746,6 @@
             <a:avLst/>
           </a:prstGeom>
           <a:noFill/>
-          <a:ln/>
         </p:spPr>
         <p:txBody>
           <a:bodyPr wrap="square" lIns="0" tIns="0" rIns="0" bIns="0" rtlCol="0" anchor="t"/>
@@ -16787,7 +16769,7 @@
       </p:sp>
       <p:sp>
         <p:nvSpPr>
-          <p:cNvPr id="20" name="strip"/>
+          <p:cNvPr id="20" name="r"/>
           <p:cNvSpPr/>
           <p:nvPr/>
         </p:nvSpPr>
@@ -16802,7 +16784,6 @@
           <a:solidFill>
             <a:srgbClr val="185FA5"/>
           </a:solidFill>
-          <a:ln/>
         </p:spPr>
         <p:txBody>
           <a:bodyPr/>
@@ -16827,7 +16808,6 @@
             <a:avLst/>
           </a:prstGeom>
           <a:noFill/>
-          <a:ln/>
         </p:spPr>
         <p:txBody>
           <a:bodyPr wrap="square" lIns="0" tIns="0" rIns="0" bIns="0" rtlCol="0" anchor="t"/>
@@ -16864,7 +16844,6 @@
             <a:avLst/>
           </a:prstGeom>
           <a:noFill/>
-          <a:ln/>
         </p:spPr>
         <p:txBody>
           <a:bodyPr wrap="square" lIns="0" tIns="0" rIns="0" bIns="0" rtlCol="0" anchor="t"/>
@@ -17041,7 +17020,7 @@
                 <a:latin typeface="Calibri" pitchFamily="34" charset="0"/>
                 <a:cs typeface="Calibri" pitchFamily="34" charset="0"/>
               </a:rPr>
-              <a:t>Night Safari entrance + 40-min tram ride (7 zones, 900+ animals)</a:t>
+              <a:t>Night Safari + 40-min tram ride (7 zones, 900+ animals)</a:t>
             </a:r>
           </a:p>
           <a:p>
@@ -17086,7 +17065,6 @@
             <a:avLst/>
           </a:prstGeom>
           <a:noFill/>
-          <a:ln/>
         </p:spPr>
         <p:txBody>
           <a:bodyPr wrap="square" lIns="0" tIns="0" rIns="0" bIns="0" rtlCol="0" anchor="t"/>
@@ -17315,7 +17293,6 @@
             <a:avLst/>
           </a:prstGeom>
           <a:noFill/>
-          <a:ln/>
         </p:spPr>
         <p:txBody>
           <a:bodyPr wrap="square" lIns="0" tIns="0" rIns="0" bIns="0" rtlCol="0" anchor="t"/>
@@ -17352,7 +17329,6 @@
             <a:avLst/>
           </a:prstGeom>
           <a:noFill/>
-          <a:ln/>
         </p:spPr>
         <p:txBody>
           <a:bodyPr wrap="square" lIns="0" tIns="0" rIns="0" bIns="0" rtlCol="0" anchor="t"/>
@@ -17389,7 +17365,6 @@
             <a:avLst/>
           </a:prstGeom>
           <a:noFill/>
-          <a:ln/>
         </p:spPr>
         <p:txBody>
           <a:bodyPr wrap="square" lIns="0" tIns="0" rIns="0" bIns="0" rtlCol="0" anchor="t"/>
@@ -17449,7 +17424,7 @@
       </p:grpSpPr>
       <p:sp>
         <p:nvSpPr>
-          <p:cNvPr id="11" name="hero"/>
+          <p:cNvPr id="11" name="r"/>
           <p:cNvSpPr/>
           <p:nvPr/>
         </p:nvSpPr>
@@ -17475,7 +17450,6 @@
             </a:gsLst>
             <a:lin ang="2700000" scaled="1"/>
           </a:gradFill>
-          <a:ln/>
         </p:spPr>
         <p:txBody>
           <a:bodyPr/>
@@ -17500,7 +17474,6 @@
             <a:avLst/>
           </a:prstGeom>
           <a:noFill/>
-          <a:ln/>
         </p:spPr>
         <p:txBody>
           <a:bodyPr wrap="square" lIns="0" tIns="0" rIns="0" bIns="0" rtlCol="0" anchor="t"/>
@@ -17537,7 +17510,6 @@
             <a:avLst/>
           </a:prstGeom>
           <a:noFill/>
-          <a:ln/>
         </p:spPr>
         <p:txBody>
           <a:bodyPr wrap="square" lIns="0" tIns="0" rIns="0" bIns="0" rtlCol="0" anchor="t"/>
@@ -17577,7 +17549,6 @@
             <a:avLst/>
           </a:prstGeom>
           <a:noFill/>
-          <a:ln/>
         </p:spPr>
         <p:txBody>
           <a:bodyPr wrap="square" lIns="0" tIns="0" rIns="0" bIns="0" rtlCol="0" anchor="t"/>
@@ -17868,7 +17839,7 @@
       </p:sp>
       <p:sp>
         <p:nvSpPr>
-          <p:cNvPr id="18" name="strip"/>
+          <p:cNvPr id="18" name="r"/>
           <p:cNvSpPr/>
           <p:nvPr/>
         </p:nvSpPr>
@@ -17883,7 +17854,6 @@
           <a:solidFill>
             <a:srgbClr val="534AB7"/>
           </a:solidFill>
-          <a:ln/>
         </p:spPr>
         <p:txBody>
           <a:bodyPr/>
@@ -17908,7 +17878,6 @@
             <a:avLst/>
           </a:prstGeom>
           <a:noFill/>
-          <a:ln/>
         </p:spPr>
         <p:txBody>
           <a:bodyPr wrap="square" lIns="0" tIns="0" rIns="0" bIns="0" rtlCol="0" anchor="t"/>
@@ -17932,7 +17901,7 @@
       </p:sp>
       <p:sp>
         <p:nvSpPr>
-          <p:cNvPr id="20" name="strip"/>
+          <p:cNvPr id="20" name="r"/>
           <p:cNvSpPr/>
           <p:nvPr/>
         </p:nvSpPr>
@@ -17947,7 +17916,6 @@
           <a:solidFill>
             <a:srgbClr val="534AB7"/>
           </a:solidFill>
-          <a:ln/>
         </p:spPr>
         <p:txBody>
           <a:bodyPr/>
@@ -17972,7 +17940,6 @@
             <a:avLst/>
           </a:prstGeom>
           <a:noFill/>
-          <a:ln/>
         </p:spPr>
         <p:txBody>
           <a:bodyPr wrap="square" lIns="0" tIns="0" rIns="0" bIns="0" rtlCol="0" anchor="t"/>
@@ -18009,7 +17976,6 @@
             <a:avLst/>
           </a:prstGeom>
           <a:noFill/>
-          <a:ln/>
         </p:spPr>
         <p:txBody>
           <a:bodyPr wrap="square" lIns="0" tIns="0" rIns="0" bIns="0" rtlCol="0" anchor="t"/>
@@ -18231,7 +18197,6 @@
             <a:avLst/>
           </a:prstGeom>
           <a:noFill/>
-          <a:ln/>
         </p:spPr>
         <p:txBody>
           <a:bodyPr wrap="square" lIns="0" tIns="0" rIns="0" bIns="0" rtlCol="0" anchor="t"/>
@@ -18460,7 +18425,6 @@
             <a:avLst/>
           </a:prstGeom>
           <a:noFill/>
-          <a:ln/>
         </p:spPr>
         <p:txBody>
           <a:bodyPr wrap="square" lIns="0" tIns="0" rIns="0" bIns="0" rtlCol="0" anchor="t"/>
@@ -18497,7 +18461,6 @@
             <a:avLst/>
           </a:prstGeom>
           <a:noFill/>
-          <a:ln/>
         </p:spPr>
         <p:txBody>
           <a:bodyPr wrap="square" lIns="0" tIns="0" rIns="0" bIns="0" rtlCol="0" anchor="t"/>
@@ -18554,7 +18517,7 @@
       </p:grpSpPr>
       <p:sp>
         <p:nvSpPr>
-          <p:cNvPr id="11" name="hero"/>
+          <p:cNvPr id="11" name="r"/>
           <p:cNvSpPr/>
           <p:nvPr/>
         </p:nvSpPr>
@@ -18580,7 +18543,6 @@
             </a:gsLst>
             <a:lin ang="2700000" scaled="1"/>
           </a:gradFill>
-          <a:ln/>
         </p:spPr>
         <p:txBody>
           <a:bodyPr/>
@@ -18605,7 +18567,6 @@
             <a:avLst/>
           </a:prstGeom>
           <a:noFill/>
-          <a:ln/>
         </p:spPr>
         <p:txBody>
           <a:bodyPr wrap="square" lIns="0" tIns="0" rIns="0" bIns="0" rtlCol="0" anchor="t"/>
@@ -18642,7 +18603,6 @@
             <a:avLst/>
           </a:prstGeom>
           <a:noFill/>
-          <a:ln/>
         </p:spPr>
         <p:txBody>
           <a:bodyPr wrap="square" lIns="0" tIns="0" rIns="0" bIns="0" rtlCol="0" anchor="t"/>
@@ -18682,7 +18642,6 @@
             <a:avLst/>
           </a:prstGeom>
           <a:noFill/>
-          <a:ln/>
         </p:spPr>
         <p:txBody>
           <a:bodyPr wrap="square" lIns="0" tIns="0" rIns="0" bIns="0" rtlCol="0" anchor="t"/>
@@ -18973,7 +18932,7 @@
       </p:sp>
       <p:sp>
         <p:nvSpPr>
-          <p:cNvPr id="18" name="strip"/>
+          <p:cNvPr id="18" name="r"/>
           <p:cNvSpPr/>
           <p:nvPr/>
         </p:nvSpPr>
@@ -18988,7 +18947,6 @@
           <a:solidFill>
             <a:srgbClr val="185FA5"/>
           </a:solidFill>
-          <a:ln/>
         </p:spPr>
         <p:txBody>
           <a:bodyPr/>
@@ -19013,7 +18971,6 @@
             <a:avLst/>
           </a:prstGeom>
           <a:noFill/>
-          <a:ln/>
         </p:spPr>
         <p:txBody>
           <a:bodyPr wrap="square" lIns="0" tIns="0" rIns="0" bIns="0" rtlCol="0" anchor="t"/>
@@ -19037,7 +18994,7 @@
       </p:sp>
       <p:sp>
         <p:nvSpPr>
-          <p:cNvPr id="20" name="strip"/>
+          <p:cNvPr id="20" name="r"/>
           <p:cNvSpPr/>
           <p:nvPr/>
         </p:nvSpPr>
@@ -19052,7 +19009,6 @@
           <a:solidFill>
             <a:srgbClr val="185FA5"/>
           </a:solidFill>
-          <a:ln/>
         </p:spPr>
         <p:txBody>
           <a:bodyPr/>
@@ -19077,7 +19033,6 @@
             <a:avLst/>
           </a:prstGeom>
           <a:noFill/>
-          <a:ln/>
         </p:spPr>
         <p:txBody>
           <a:bodyPr wrap="square" lIns="0" tIns="0" rIns="0" bIns="0" rtlCol="0" anchor="t"/>
@@ -19114,7 +19069,6 @@
             <a:avLst/>
           </a:prstGeom>
           <a:noFill/>
-          <a:ln/>
         </p:spPr>
         <p:txBody>
           <a:bodyPr wrap="square" lIns="0" tIns="0" rIns="0" bIns="0" rtlCol="0" anchor="t"/>
@@ -19261,7 +19215,6 @@
             <a:avLst/>
           </a:prstGeom>
           <a:noFill/>
-          <a:ln/>
         </p:spPr>
         <p:txBody>
           <a:bodyPr wrap="square" lIns="0" tIns="0" rIns="0" bIns="0" rtlCol="0" anchor="t"/>
@@ -19490,7 +19443,6 @@
             <a:avLst/>
           </a:prstGeom>
           <a:noFill/>
-          <a:ln/>
         </p:spPr>
         <p:txBody>
           <a:bodyPr wrap="square" lIns="0" tIns="0" rIns="0" bIns="0" rtlCol="0" anchor="t"/>
@@ -19527,7 +19479,6 @@
             <a:avLst/>
           </a:prstGeom>
           <a:noFill/>
-          <a:ln/>
         </p:spPr>
         <p:txBody>
           <a:bodyPr wrap="square" lIns="0" tIns="0" rIns="0" bIns="0" rtlCol="0" anchor="t"/>
@@ -19584,7 +19535,7 @@
       </p:grpSpPr>
       <p:sp>
         <p:nvSpPr>
-          <p:cNvPr id="11" name="hero"/>
+          <p:cNvPr id="11" name="r"/>
           <p:cNvSpPr/>
           <p:nvPr/>
         </p:nvSpPr>
@@ -19610,7 +19561,6 @@
             </a:gsLst>
             <a:lin ang="2700000" scaled="1"/>
           </a:gradFill>
-          <a:ln/>
         </p:spPr>
         <p:txBody>
           <a:bodyPr/>
@@ -19635,7 +19585,6 @@
             <a:avLst/>
           </a:prstGeom>
           <a:noFill/>
-          <a:ln/>
         </p:spPr>
         <p:txBody>
           <a:bodyPr wrap="square" lIns="0" tIns="0" rIns="0" bIns="0" rtlCol="0" anchor="t"/>
@@ -19672,7 +19621,6 @@
             <a:avLst/>
           </a:prstGeom>
           <a:noFill/>
-          <a:ln/>
         </p:spPr>
         <p:txBody>
           <a:bodyPr wrap="square" lIns="0" tIns="0" rIns="0" bIns="0" rtlCol="0" anchor="t"/>
@@ -19712,7 +19660,6 @@
             <a:avLst/>
           </a:prstGeom>
           <a:noFill/>
-          <a:ln/>
         </p:spPr>
         <p:txBody>
           <a:bodyPr wrap="square" lIns="0" tIns="0" rIns="0" bIns="0" rtlCol="0" anchor="t"/>
@@ -20003,7 +19950,7 @@
       </p:sp>
       <p:sp>
         <p:nvSpPr>
-          <p:cNvPr id="18" name="strip"/>
+          <p:cNvPr id="18" name="r"/>
           <p:cNvSpPr/>
           <p:nvPr/>
         </p:nvSpPr>
@@ -20018,7 +19965,6 @@
           <a:solidFill>
             <a:srgbClr val="0F6E56"/>
           </a:solidFill>
-          <a:ln/>
         </p:spPr>
         <p:txBody>
           <a:bodyPr/>
@@ -20043,7 +19989,6 @@
             <a:avLst/>
           </a:prstGeom>
           <a:noFill/>
-          <a:ln/>
         </p:spPr>
         <p:txBody>
           <a:bodyPr wrap="square" lIns="0" tIns="0" rIns="0" bIns="0" rtlCol="0" anchor="t"/>
@@ -20067,7 +20012,7 @@
       </p:sp>
       <p:sp>
         <p:nvSpPr>
-          <p:cNvPr id="20" name="strip"/>
+          <p:cNvPr id="20" name="r"/>
           <p:cNvSpPr/>
           <p:nvPr/>
         </p:nvSpPr>
@@ -20082,7 +20027,6 @@
           <a:solidFill>
             <a:srgbClr val="0F6E56"/>
           </a:solidFill>
-          <a:ln/>
         </p:spPr>
         <p:txBody>
           <a:bodyPr/>
@@ -20107,7 +20051,6 @@
             <a:avLst/>
           </a:prstGeom>
           <a:noFill/>
-          <a:ln/>
         </p:spPr>
         <p:txBody>
           <a:bodyPr wrap="square" lIns="0" tIns="0" rIns="0" bIns="0" rtlCol="0" anchor="t"/>
@@ -20144,7 +20087,6 @@
             <a:avLst/>
           </a:prstGeom>
           <a:noFill/>
-          <a:ln/>
         </p:spPr>
         <p:txBody>
           <a:bodyPr wrap="square" lIns="0" tIns="0" rIns="0" bIns="0" rtlCol="0" anchor="t"/>
@@ -20291,7 +20233,6 @@
             <a:avLst/>
           </a:prstGeom>
           <a:noFill/>
-          <a:ln/>
         </p:spPr>
         <p:txBody>
           <a:bodyPr wrap="square" lIns="0" tIns="0" rIns="0" bIns="0" rtlCol="0" anchor="t"/>
@@ -20478,7 +20419,6 @@
             <a:avLst/>
           </a:prstGeom>
           <a:noFill/>
-          <a:ln/>
         </p:spPr>
         <p:txBody>
           <a:bodyPr wrap="square" lIns="0" tIns="0" rIns="0" bIns="0" rtlCol="0" anchor="t"/>
@@ -20515,7 +20455,6 @@
             <a:avLst/>
           </a:prstGeom>
           <a:noFill/>
-          <a:ln/>
         </p:spPr>
         <p:txBody>
           <a:bodyPr wrap="square" lIns="0" tIns="0" rIns="0" bIns="0" rtlCol="0" anchor="t"/>
@@ -20552,7 +20491,6 @@
             <a:avLst/>
           </a:prstGeom>
           <a:noFill/>
-          <a:ln/>
         </p:spPr>
         <p:txBody>
           <a:bodyPr wrap="square" lIns="0" tIns="0" rIns="0" bIns="0" rtlCol="0" anchor="t"/>

--- a/AsiaGo_Pass_Presentation1_enhanced.pptx
+++ b/AsiaGo_Pass_Presentation1_enhanced.pptx
@@ -17,11 +17,11 @@
     <p:sldId id="269" r:id="rId8"/>
     <p:sldId id="278" r:id="rId9"/>
     <p:sldId id="274" r:id="rId10"/>
-    <p:sldId id="300" r:id="rId24"/>
-    <p:sldId id="301" r:id="rId25"/>
-    <p:sldId id="302" r:id="rId26"/>
-    <p:sldId id="303" r:id="rId27"/>
-    <p:sldId id="304" r:id="rId28"/>
+    <p:sldId id="300" r:id="rId28"/>
+    <p:sldId id="301" r:id="rId29"/>
+    <p:sldId id="302" r:id="rId30"/>
+    <p:sldId id="303" r:id="rId31"/>
+    <p:sldId id="304" r:id="rId32"/>
     <p:sldId id="275" r:id="rId11"/>
     <p:sldId id="258" r:id="rId12"/>
     <p:sldId id="273" r:id="rId13"/>

--- a/AsiaGo_Pass_Presentation1_enhanced.pptx
+++ b/AsiaGo_Pass_Presentation1_enhanced.pptx
@@ -22,6 +22,11 @@
     <p:sldId id="302" r:id="rId30"/>
     <p:sldId id="303" r:id="rId31"/>
     <p:sldId id="304" r:id="rId32"/>
+    <p:sldId id="305" r:id="rId33"/>
+    <p:sldId id="306" r:id="rId34"/>
+    <p:sldId id="307" r:id="rId35"/>
+    <p:sldId id="308" r:id="rId36"/>
+    <p:sldId id="309" r:id="rId37"/>
     <p:sldId id="275" r:id="rId11"/>
     <p:sldId id="258" r:id="rId12"/>
     <p:sldId id="273" r:id="rId13"/>
@@ -20523,6 +20528,3011 @@
 </p:sld>
 </file>
 
+<file path=ppt/slides/slide27.xml><?xml version="1.0" encoding="utf-8"?>
+<p:sld xmlns:a="http://schemas.openxmlformats.org/drawingml/2006/main" xmlns:r="http://schemas.openxmlformats.org/officeDocument/2006/relationships" xmlns:p="http://schemas.openxmlformats.org/presentationml/2006/main">
+  <p:cSld>
+    <p:bg>
+      <p:bgPr>
+        <a:solidFill>
+          <a:srgbClr val="121316"/>
+        </a:solidFill>
+        <a:effectLst/>
+      </p:bgPr>
+    </p:bg>
+    <p:spTree>
+      <p:nvGrpSpPr>
+        <p:cNvPr id="1" name=""/>
+        <p:cNvGrpSpPr/>
+        <p:nvPr/>
+      </p:nvGrpSpPr>
+      <p:grpSpPr>
+        <a:xfrm>
+          <a:off x="0" y="0"/>
+          <a:ext cx="0" cy="0"/>
+          <a:chOff x="0" y="0"/>
+          <a:chExt cx="0" cy="0"/>
+        </a:xfrm>
+      </p:grpSpPr>
+      <p:sp>
+        <p:nvSpPr>
+          <p:cNvPr id="11" name="r"/>
+          <p:cNvSpPr/>
+          <p:nvPr/>
+        </p:nvSpPr>
+        <p:spPr>
+          <a:xfrm>
+            <a:off x="0" y="0"/>
+            <a:ext cx="12192000" cy="1990000"/>
+          </a:xfrm>
+          <a:prstGeom prst="rect">
+            <a:avLst/>
+          </a:prstGeom>
+          <a:gradFill>
+            <a:gsLst>
+              <a:gs pos="0">
+                <a:srgbClr val="2A1A0F"/>
+              </a:gs>
+              <a:gs pos="55000">
+                <a:srgbClr val="8A5A1E"/>
+              </a:gs>
+              <a:gs pos="100000">
+                <a:srgbClr val="C8A24A"/>
+              </a:gs>
+            </a:gsLst>
+            <a:lin ang="2700000" scaled="1"/>
+          </a:gradFill>
+        </p:spPr>
+        <p:txBody>
+          <a:bodyPr/>
+          <a:lstStyle/>
+          <a:p>
+            <a:endParaRPr lang="en-US"/>
+          </a:p>
+        </p:txBody>
+      </p:sp>
+      <p:sp>
+        <p:nvSpPr>
+          <p:cNvPr id="12" name="tb"/>
+          <p:cNvSpPr/>
+          <p:nvPr/>
+        </p:nvSpPr>
+        <p:spPr>
+          <a:xfrm>
+            <a:off x="822960" y="300000"/>
+            <a:ext cx="9000000" cy="260000"/>
+          </a:xfrm>
+          <a:prstGeom prst="rect">
+            <a:avLst/>
+          </a:prstGeom>
+          <a:noFill/>
+        </p:spPr>
+        <p:txBody>
+          <a:bodyPr wrap="square" lIns="0" tIns="0" rIns="0" bIns="0" rtlCol="0" anchor="t"/>
+          <a:lstStyle/>
+          <a:p>
+            <a:pPr marL="0" indent="0" algn="l">
+              <a:buNone/>
+            </a:pPr>
+            <a:r>
+              <a:rPr lang="en-US" sz="1050" b="1" spc="300" kern="0" dirty="0">
+                <a:solidFill>
+                  <a:srgbClr val="FFFFFF"/>
+                </a:solidFill>
+                <a:latin typeface="Calibri" pitchFamily="34" charset="0"/>
+                <a:cs typeface="Calibri" pitchFamily="34" charset="0"/>
+              </a:rPr>
+              <a:t>AsiaGO PASS  ·  HOTEL COLLECTION</a:t>
+            </a:r>
+          </a:p>
+        </p:txBody>
+      </p:sp>
+      <p:sp>
+        <p:nvSpPr>
+          <p:cNvPr id="13" name="tb"/>
+          <p:cNvSpPr/>
+          <p:nvPr/>
+        </p:nvSpPr>
+        <p:spPr>
+          <a:xfrm>
+            <a:off x="822960" y="610000"/>
+            <a:ext cx="10000000" cy="840000"/>
+          </a:xfrm>
+          <a:prstGeom prst="rect">
+            <a:avLst/>
+          </a:prstGeom>
+          <a:noFill/>
+        </p:spPr>
+        <p:txBody>
+          <a:bodyPr wrap="square" lIns="0" tIns="0" rIns="0" bIns="0" rtlCol="0" anchor="t"/>
+          <a:lstStyle/>
+          <a:p>
+            <a:pPr marL="0" indent="0" algn="l">
+              <a:lnSpc>
+                <a:spcPct val="100000"/>
+              </a:lnSpc>
+              <a:buNone/>
+            </a:pPr>
+            <a:r>
+              <a:rPr lang="en-US" sz="3000" b="1" kern="0" dirty="0">
+                <a:solidFill>
+                  <a:srgbClr val="FFFFFF"/>
+                </a:solidFill>
+                <a:latin typeface="Georgia" pitchFamily="34" charset="0"/>
+                <a:cs typeface="Georgia" pitchFamily="34" charset="0"/>
+              </a:rPr>
+              <a:t>Amara Singapore</a:t>
+            </a:r>
+          </a:p>
+        </p:txBody>
+      </p:sp>
+      <p:sp>
+        <p:nvSpPr>
+          <p:cNvPr id="14" name="tb"/>
+          <p:cNvSpPr/>
+          <p:nvPr/>
+        </p:nvSpPr>
+        <p:spPr>
+          <a:xfrm>
+            <a:off x="822960" y="1480000"/>
+            <a:ext cx="9600000" cy="440000"/>
+          </a:xfrm>
+          <a:prstGeom prst="rect">
+            <a:avLst/>
+          </a:prstGeom>
+          <a:noFill/>
+        </p:spPr>
+        <p:txBody>
+          <a:bodyPr wrap="square" lIns="0" tIns="0" rIns="0" bIns="0" rtlCol="0" anchor="t"/>
+          <a:lstStyle/>
+          <a:p>
+            <a:pPr marL="0" indent="0" algn="l">
+              <a:lnSpc>
+                <a:spcPct val="104000"/>
+              </a:lnSpc>
+              <a:buNone/>
+            </a:pPr>
+            <a:r>
+              <a:rPr lang="en-US" sz="1250" kern="0" dirty="0">
+                <a:solidFill>
+                  <a:srgbClr val="FFFFFF"/>
+                </a:solidFill>
+                <a:latin typeface="Calibri" pitchFamily="34" charset="0"/>
+                <a:cs typeface="Calibri" pitchFamily="34" charset="0"/>
+              </a:rPr>
+              <a:t>Club Room for 2 · 165 Tanjong Pagar Road — Club Lounge living in the heart of the city.</a:t>
+            </a:r>
+          </a:p>
+        </p:txBody>
+      </p:sp>
+      <p:sp>
+        <p:nvSpPr>
+          <p:cNvPr id="15" name="card"/>
+          <p:cNvSpPr/>
+          <p:nvPr/>
+        </p:nvSpPr>
+        <p:spPr>
+          <a:xfrm>
+            <a:off x="822960" y="2150000"/>
+            <a:ext cx="3355360" cy="950000"/>
+          </a:xfrm>
+          <a:prstGeom prst="roundRect">
+            <a:avLst>
+              <a:gd name="adj" fmla="val 6000"/>
+            </a:avLst>
+          </a:prstGeom>
+          <a:solidFill>
+            <a:srgbClr val="1C1F24"/>
+          </a:solidFill>
+          <a:ln w="12700">
+            <a:solidFill>
+              <a:srgbClr val="C8A24A"/>
+            </a:solidFill>
+            <a:prstDash val="solid"/>
+          </a:ln>
+        </p:spPr>
+        <p:txBody>
+          <a:bodyPr wrap="square" lIns="137160" tIns="68580" rIns="137160" bIns="68580" rtlCol="0" anchor="ctr"/>
+          <a:lstStyle/>
+          <a:p>
+            <a:pPr marL="0" indent="0" algn="l">
+              <a:lnSpc>
+                <a:spcPct val="100000"/>
+              </a:lnSpc>
+              <a:buNone/>
+            </a:pPr>
+            <a:r>
+              <a:rPr lang="en-US" sz="1000" b="1" spc="200" kern="0" dirty="0">
+                <a:solidFill>
+                  <a:srgbClr val="C8A24A"/>
+                </a:solidFill>
+                <a:latin typeface="Calibri" pitchFamily="34" charset="0"/>
+                <a:cs typeface="Calibri" pitchFamily="34" charset="0"/>
+              </a:rPr>
+              <a:t>STAY</a:t>
+            </a:r>
+          </a:p>
+          <a:p>
+            <a:pPr marL="0" indent="0" algn="l">
+              <a:lnSpc>
+                <a:spcPct val="100000"/>
+              </a:lnSpc>
+              <a:spcBef>
+                <a:spcPts val="200"/>
+              </a:spcBef>
+              <a:buNone/>
+            </a:pPr>
+            <a:r>
+              <a:rPr lang="en-US" sz="1600" b="1" kern="0" dirty="0">
+                <a:solidFill>
+                  <a:srgbClr val="F2EEE6"/>
+                </a:solidFill>
+                <a:latin typeface="Calibri" pitchFamily="34" charset="0"/>
+                <a:cs typeface="Calibri" pitchFamily="34" charset="0"/>
+              </a:rPr>
+              <a:t>3 Nights</a:t>
+            </a:r>
+          </a:p>
+          <a:p>
+            <a:pPr marL="0" indent="0" algn="l">
+              <a:lnSpc>
+                <a:spcPct val="100000"/>
+              </a:lnSpc>
+              <a:spcBef>
+                <a:spcPts val="200"/>
+              </a:spcBef>
+              <a:buNone/>
+            </a:pPr>
+            <a:r>
+              <a:rPr lang="en-US" sz="850" kern="0" dirty="0">
+                <a:solidFill>
+                  <a:srgbClr val="A7A296"/>
+                </a:solidFill>
+                <a:latin typeface="Calibri" pitchFamily="34" charset="0"/>
+                <a:cs typeface="Calibri" pitchFamily="34" charset="0"/>
+              </a:rPr>
+              <a:t>minimum stay</a:t>
+            </a:r>
+          </a:p>
+        </p:txBody>
+      </p:sp>
+      <p:sp>
+        <p:nvSpPr>
+          <p:cNvPr id="16" name="card"/>
+          <p:cNvSpPr/>
+          <p:nvPr/>
+        </p:nvSpPr>
+        <p:spPr>
+          <a:xfrm>
+            <a:off x="4418320" y="2150000"/>
+            <a:ext cx="3355360" cy="950000"/>
+          </a:xfrm>
+          <a:prstGeom prst="roundRect">
+            <a:avLst>
+              <a:gd name="adj" fmla="val 6000"/>
+            </a:avLst>
+          </a:prstGeom>
+          <a:solidFill>
+            <a:srgbClr val="1C1F24"/>
+          </a:solidFill>
+          <a:ln w="12700">
+            <a:solidFill>
+              <a:srgbClr val="C8A24A"/>
+            </a:solidFill>
+            <a:prstDash val="solid"/>
+          </a:ln>
+        </p:spPr>
+        <p:txBody>
+          <a:bodyPr wrap="square" lIns="137160" tIns="68580" rIns="137160" bIns="68580" rtlCol="0" anchor="ctr"/>
+          <a:lstStyle/>
+          <a:p>
+            <a:pPr marL="0" indent="0" algn="l">
+              <a:lnSpc>
+                <a:spcPct val="100000"/>
+              </a:lnSpc>
+              <a:buNone/>
+            </a:pPr>
+            <a:r>
+              <a:rPr lang="en-US" sz="1000" b="1" spc="200" kern="0" dirty="0">
+                <a:solidFill>
+                  <a:srgbClr val="C8A24A"/>
+                </a:solidFill>
+                <a:latin typeface="Calibri" pitchFamily="34" charset="0"/>
+                <a:cs typeface="Calibri" pitchFamily="34" charset="0"/>
+              </a:rPr>
+              <a:t>ROOM</a:t>
+            </a:r>
+          </a:p>
+          <a:p>
+            <a:pPr marL="0" indent="0" algn="l">
+              <a:lnSpc>
+                <a:spcPct val="100000"/>
+              </a:lnSpc>
+              <a:spcBef>
+                <a:spcPts val="200"/>
+              </a:spcBef>
+              <a:buNone/>
+            </a:pPr>
+            <a:r>
+              <a:rPr lang="en-US" sz="1600" b="1" kern="0" dirty="0">
+                <a:solidFill>
+                  <a:srgbClr val="F2EEE6"/>
+                </a:solidFill>
+                <a:latin typeface="Calibri" pitchFamily="34" charset="0"/>
+                <a:cs typeface="Calibri" pitchFamily="34" charset="0"/>
+              </a:rPr>
+              <a:t>Club Room</a:t>
+            </a:r>
+          </a:p>
+          <a:p>
+            <a:pPr marL="0" indent="0" algn="l">
+              <a:lnSpc>
+                <a:spcPct val="100000"/>
+              </a:lnSpc>
+              <a:spcBef>
+                <a:spcPts val="200"/>
+              </a:spcBef>
+              <a:buNone/>
+            </a:pPr>
+            <a:r>
+              <a:rPr lang="en-US" sz="850" kern="0" dirty="0">
+                <a:solidFill>
+                  <a:srgbClr val="A7A296"/>
+                </a:solidFill>
+                <a:latin typeface="Calibri" pitchFamily="34" charset="0"/>
+                <a:cs typeface="Calibri" pitchFamily="34" charset="0"/>
+              </a:rPr>
+              <a:t>for 2 guests</a:t>
+            </a:r>
+          </a:p>
+        </p:txBody>
+      </p:sp>
+      <p:sp>
+        <p:nvSpPr>
+          <p:cNvPr id="17" name="card"/>
+          <p:cNvSpPr/>
+          <p:nvPr/>
+        </p:nvSpPr>
+        <p:spPr>
+          <a:xfrm>
+            <a:off x="8013680" y="2150000"/>
+            <a:ext cx="3355360" cy="950000"/>
+          </a:xfrm>
+          <a:prstGeom prst="roundRect">
+            <a:avLst>
+              <a:gd name="adj" fmla="val 6000"/>
+            </a:avLst>
+          </a:prstGeom>
+          <a:solidFill>
+            <a:srgbClr val="23201A"/>
+          </a:solidFill>
+          <a:ln w="15875">
+            <a:solidFill>
+              <a:srgbClr val="C8A24A"/>
+            </a:solidFill>
+            <a:prstDash val="solid"/>
+          </a:ln>
+        </p:spPr>
+        <p:txBody>
+          <a:bodyPr wrap="square" lIns="137160" tIns="68580" rIns="137160" bIns="68580" rtlCol="0" anchor="ctr"/>
+          <a:lstStyle/>
+          <a:p>
+            <a:pPr marL="0" indent="0" algn="l">
+              <a:lnSpc>
+                <a:spcPct val="100000"/>
+              </a:lnSpc>
+              <a:buNone/>
+            </a:pPr>
+            <a:r>
+              <a:rPr lang="en-US" sz="1000" b="1" spc="200" kern="0" dirty="0">
+                <a:solidFill>
+                  <a:srgbClr val="E6CE8F"/>
+                </a:solidFill>
+                <a:latin typeface="Calibri" pitchFamily="34" charset="0"/>
+                <a:cs typeface="Calibri" pitchFamily="34" charset="0"/>
+              </a:rPr>
+              <a:t>FROM</a:t>
+            </a:r>
+          </a:p>
+          <a:p>
+            <a:pPr marL="0" indent="0" algn="l">
+              <a:lnSpc>
+                <a:spcPct val="100000"/>
+              </a:lnSpc>
+              <a:spcBef>
+                <a:spcPts val="200"/>
+              </a:spcBef>
+              <a:buNone/>
+            </a:pPr>
+            <a:r>
+              <a:rPr lang="en-US" sz="2400" b="1" kern="0" dirty="0">
+                <a:solidFill>
+                  <a:srgbClr val="F2EEE6"/>
+                </a:solidFill>
+                <a:latin typeface="Georgia" pitchFamily="34" charset="0"/>
+                <a:cs typeface="Georgia" pitchFamily="34" charset="0"/>
+              </a:rPr>
+              <a:t>888</a:t>
+            </a:r>
+          </a:p>
+          <a:p>
+            <a:pPr marL="0" indent="0" algn="l">
+              <a:lnSpc>
+                <a:spcPct val="100000"/>
+              </a:lnSpc>
+              <a:spcBef>
+                <a:spcPts val="200"/>
+              </a:spcBef>
+              <a:buNone/>
+            </a:pPr>
+            <a:r>
+              <a:rPr lang="en-US" sz="850" kern="0" dirty="0">
+                <a:solidFill>
+                  <a:srgbClr val="A7A296"/>
+                </a:solidFill>
+                <a:latin typeface="Calibri" pitchFamily="34" charset="0"/>
+                <a:cs typeface="Calibri" pitchFamily="34" charset="0"/>
+              </a:rPr>
+              <a:t>AsiaGO! Pass Credits, total</a:t>
+            </a:r>
+          </a:p>
+        </p:txBody>
+      </p:sp>
+      <p:sp>
+        <p:nvSpPr>
+          <p:cNvPr id="18" name="r"/>
+          <p:cNvSpPr/>
+          <p:nvPr/>
+        </p:nvSpPr>
+        <p:spPr>
+          <a:xfrm>
+            <a:off x="822960" y="3370000"/>
+            <a:ext cx="360000" cy="45720"/>
+          </a:xfrm>
+          <a:prstGeom prst="rect">
+            <a:avLst/>
+          </a:prstGeom>
+          <a:solidFill>
+            <a:srgbClr val="C8A24A"/>
+          </a:solidFill>
+        </p:spPr>
+        <p:txBody>
+          <a:bodyPr/>
+          <a:lstStyle/>
+          <a:p>
+            <a:endParaRPr lang="en-US"/>
+          </a:p>
+        </p:txBody>
+      </p:sp>
+      <p:sp>
+        <p:nvSpPr>
+          <p:cNvPr id="19" name="tb"/>
+          <p:cNvSpPr/>
+          <p:nvPr/>
+        </p:nvSpPr>
+        <p:spPr>
+          <a:xfrm>
+            <a:off x="1262960" y="3340000"/>
+            <a:ext cx="5740000" cy="250000"/>
+          </a:xfrm>
+          <a:prstGeom prst="rect">
+            <a:avLst/>
+          </a:prstGeom>
+          <a:noFill/>
+        </p:spPr>
+        <p:txBody>
+          <a:bodyPr wrap="square" lIns="0" tIns="0" rIns="0" bIns="0" rtlCol="0" anchor="t"/>
+          <a:lstStyle/>
+          <a:p>
+            <a:pPr marL="0" indent="0" algn="l">
+              <a:buNone/>
+            </a:pPr>
+            <a:r>
+              <a:rPr lang="en-US" sz="1100" b="1" spc="280" kern="0" dirty="0">
+                <a:solidFill>
+                  <a:srgbClr val="C8A24A"/>
+                </a:solidFill>
+                <a:latin typeface="Calibri" pitchFamily="34" charset="0"/>
+                <a:cs typeface="Calibri" pitchFamily="34" charset="0"/>
+              </a:rPr>
+              <a:t>WHAT'S INCLUDED</a:t>
+            </a:r>
+          </a:p>
+        </p:txBody>
+      </p:sp>
+      <p:sp>
+        <p:nvSpPr>
+          <p:cNvPr id="20" name="r"/>
+          <p:cNvSpPr/>
+          <p:nvPr/>
+        </p:nvSpPr>
+        <p:spPr>
+          <a:xfrm>
+            <a:off x="7362960" y="3370000"/>
+            <a:ext cx="360000" cy="45720"/>
+          </a:xfrm>
+          <a:prstGeom prst="rect">
+            <a:avLst/>
+          </a:prstGeom>
+          <a:solidFill>
+            <a:srgbClr val="C8A24A"/>
+          </a:solidFill>
+        </p:spPr>
+        <p:txBody>
+          <a:bodyPr/>
+          <a:lstStyle/>
+          <a:p>
+            <a:endParaRPr lang="en-US"/>
+          </a:p>
+        </p:txBody>
+      </p:sp>
+      <p:sp>
+        <p:nvSpPr>
+          <p:cNvPr id="21" name="tb"/>
+          <p:cNvSpPr/>
+          <p:nvPr/>
+        </p:nvSpPr>
+        <p:spPr>
+          <a:xfrm>
+            <a:off x="7802960" y="3340000"/>
+            <a:ext cx="3566080" cy="250000"/>
+          </a:xfrm>
+          <a:prstGeom prst="rect">
+            <a:avLst/>
+          </a:prstGeom>
+          <a:noFill/>
+        </p:spPr>
+        <p:txBody>
+          <a:bodyPr wrap="square" lIns="0" tIns="0" rIns="0" bIns="0" rtlCol="0" anchor="t"/>
+          <a:lstStyle/>
+          <a:p>
+            <a:pPr marL="0" indent="0" algn="l">
+              <a:buNone/>
+            </a:pPr>
+            <a:r>
+              <a:rPr lang="en-US" sz="1100" b="1" spc="240" kern="0" dirty="0">
+                <a:solidFill>
+                  <a:srgbClr val="C8A24A"/>
+                </a:solidFill>
+                <a:latin typeface="Calibri" pitchFamily="34" charset="0"/>
+                <a:cs typeface="Calibri" pitchFamily="34" charset="0"/>
+              </a:rPr>
+              <a:t>WHY GUESTS LOVE IT</a:t>
+            </a:r>
+          </a:p>
+        </p:txBody>
+      </p:sp>
+      <p:sp>
+        <p:nvSpPr>
+          <p:cNvPr id="22" name="tb"/>
+          <p:cNvSpPr/>
+          <p:nvPr/>
+        </p:nvSpPr>
+        <p:spPr>
+          <a:xfrm>
+            <a:off x="822960" y="3670000"/>
+            <a:ext cx="6180000" cy="3000000"/>
+          </a:xfrm>
+          <a:prstGeom prst="rect">
+            <a:avLst/>
+          </a:prstGeom>
+          <a:noFill/>
+        </p:spPr>
+        <p:txBody>
+          <a:bodyPr wrap="square" lIns="0" tIns="0" rIns="0" bIns="0" rtlCol="0" anchor="t"/>
+          <a:lstStyle/>
+          <a:p>
+            <a:pPr marL="200000" indent="-200000" algn="l">
+              <a:lnSpc>
+                <a:spcPct val="100000"/>
+              </a:lnSpc>
+              <a:spcBef>
+                <a:spcPts val="400"/>
+              </a:spcBef>
+              <a:buClr>
+                <a:srgbClr val="C8A24A"/>
+              </a:buClr>
+              <a:buFont typeface="Arial"/>
+              <a:buChar char="▸"/>
+            </a:pPr>
+            <a:r>
+              <a:rPr lang="en-US" sz="1050" kern="0" dirty="0">
+                <a:solidFill>
+                  <a:srgbClr val="F2EEE6"/>
+                </a:solidFill>
+                <a:latin typeface="Calibri" pitchFamily="34" charset="0"/>
+                <a:cs typeface="Calibri" pitchFamily="34" charset="0"/>
+              </a:rPr>
+              <a:t>Daily buffet breakfast at The Club or Element</a:t>
+            </a:r>
+          </a:p>
+          <a:p>
+            <a:pPr marL="200000" indent="-200000" algn="l">
+              <a:lnSpc>
+                <a:spcPct val="100000"/>
+              </a:lnSpc>
+              <a:spcBef>
+                <a:spcPts val="400"/>
+              </a:spcBef>
+              <a:buClr>
+                <a:srgbClr val="C8A24A"/>
+              </a:buClr>
+              <a:buFont typeface="Arial"/>
+              <a:buChar char="▸"/>
+            </a:pPr>
+            <a:r>
+              <a:rPr lang="en-US" sz="1050" kern="0" dirty="0">
+                <a:solidFill>
+                  <a:srgbClr val="F2EEE6"/>
+                </a:solidFill>
+                <a:latin typeface="Calibri" pitchFamily="34" charset="0"/>
+                <a:cs typeface="Calibri" pitchFamily="34" charset="0"/>
+              </a:rPr>
+              <a:t>Nightly 2-hour free-flow cocktails &amp; canapés at The Club Lounge (12+)</a:t>
+            </a:r>
+          </a:p>
+          <a:p>
+            <a:pPr marL="200000" indent="-200000" algn="l">
+              <a:lnSpc>
+                <a:spcPct val="100000"/>
+              </a:lnSpc>
+              <a:spcBef>
+                <a:spcPts val="400"/>
+              </a:spcBef>
+              <a:buClr>
+                <a:srgbClr val="C8A24A"/>
+              </a:buClr>
+              <a:buFont typeface="Arial"/>
+              <a:buChar char="▸"/>
+            </a:pPr>
+            <a:r>
+              <a:rPr lang="en-US" sz="1050" kern="0" dirty="0">
+                <a:solidFill>
+                  <a:srgbClr val="F2EEE6"/>
+                </a:solidFill>
+                <a:latin typeface="Calibri" pitchFamily="34" charset="0"/>
+                <a:cs typeface="Calibri" pitchFamily="34" charset="0"/>
+              </a:rPr>
+              <a:t>Club privileges — evening cocktails &amp; daily breakfast</a:t>
+            </a:r>
+          </a:p>
+          <a:p>
+            <a:pPr marL="200000" indent="-200000" algn="l">
+              <a:lnSpc>
+                <a:spcPct val="100000"/>
+              </a:lnSpc>
+              <a:spcBef>
+                <a:spcPts val="400"/>
+              </a:spcBef>
+              <a:buClr>
+                <a:srgbClr val="C8A24A"/>
+              </a:buClr>
+              <a:buFont typeface="Arial"/>
+              <a:buChar char="▸"/>
+            </a:pPr>
+            <a:r>
+              <a:rPr lang="en-US" sz="1050" kern="0" dirty="0">
+                <a:solidFill>
+                  <a:srgbClr val="F2EEE6"/>
+                </a:solidFill>
+                <a:latin typeface="Calibri" pitchFamily="34" charset="0"/>
+                <a:cs typeface="Calibri" pitchFamily="34" charset="0"/>
+              </a:rPr>
+              <a:t>In-room non-alcoholic minibar, replenished daily</a:t>
+            </a:r>
+          </a:p>
+          <a:p>
+            <a:pPr marL="200000" indent="-200000" algn="l">
+              <a:lnSpc>
+                <a:spcPct val="100000"/>
+              </a:lnSpc>
+              <a:spcBef>
+                <a:spcPts val="400"/>
+              </a:spcBef>
+              <a:buClr>
+                <a:srgbClr val="C8A24A"/>
+              </a:buClr>
+              <a:buFont typeface="Arial"/>
+              <a:buChar char="▸"/>
+            </a:pPr>
+            <a:r>
+              <a:rPr lang="en-US" sz="1050" kern="0" dirty="0">
+                <a:solidFill>
+                  <a:srgbClr val="F2EEE6"/>
+                </a:solidFill>
+                <a:latin typeface="Calibri" pitchFamily="34" charset="0"/>
+                <a:cs typeface="Calibri" pitchFamily="34" charset="0"/>
+              </a:rPr>
+              <a:t>One-time dining credit at Element &amp; Cafe Oriental</a:t>
+            </a:r>
+          </a:p>
+          <a:p>
+            <a:pPr marL="200000" indent="-200000" algn="l">
+              <a:lnSpc>
+                <a:spcPct val="100000"/>
+              </a:lnSpc>
+              <a:spcBef>
+                <a:spcPts val="400"/>
+              </a:spcBef>
+              <a:buClr>
+                <a:srgbClr val="C8A24A"/>
+              </a:buClr>
+              <a:buFont typeface="Arial"/>
+              <a:buChar char="▸"/>
+            </a:pPr>
+            <a:r>
+              <a:rPr lang="en-US" sz="1050" kern="0" dirty="0">
+                <a:solidFill>
+                  <a:srgbClr val="F2EEE6"/>
+                </a:solidFill>
+                <a:latin typeface="Calibri" pitchFamily="34" charset="0"/>
+                <a:cs typeface="Calibri" pitchFamily="34" charset="0"/>
+              </a:rPr>
+              <a:t>2pm late check-out (subject to availability)</a:t>
+            </a:r>
+          </a:p>
+        </p:txBody>
+      </p:sp>
+      <p:sp>
+        <p:nvSpPr>
+          <p:cNvPr id="23" name="tb"/>
+          <p:cNvSpPr/>
+          <p:nvPr/>
+        </p:nvSpPr>
+        <p:spPr>
+          <a:xfrm>
+            <a:off x="7362960" y="3670000"/>
+            <a:ext cx="4006080" cy="3000000"/>
+          </a:xfrm>
+          <a:prstGeom prst="rect">
+            <a:avLst/>
+          </a:prstGeom>
+          <a:noFill/>
+        </p:spPr>
+        <p:txBody>
+          <a:bodyPr wrap="square" lIns="0" tIns="0" rIns="0" bIns="0" rtlCol="0" anchor="t"/>
+          <a:lstStyle/>
+          <a:p>
+            <a:pPr marL="0" indent="0" algn="l">
+              <a:lnSpc>
+                <a:spcPct val="100000"/>
+              </a:lnSpc>
+              <a:buNone/>
+            </a:pPr>
+            <a:r>
+              <a:rPr lang="en-US" sz="1100" b="1" kern="0" dirty="0">
+                <a:solidFill>
+                  <a:srgbClr val="F2EEE6"/>
+                </a:solidFill>
+                <a:latin typeface="Calibri" pitchFamily="34" charset="0"/>
+                <a:cs typeface="Calibri" pitchFamily="34" charset="0"/>
+              </a:rPr>
+              <a:t>Heart of the city</a:t>
+            </a:r>
+          </a:p>
+          <a:p>
+            <a:pPr marL="0" indent="0" algn="l">
+              <a:lnSpc>
+                <a:spcPct val="100000"/>
+              </a:lnSpc>
+              <a:spcBef>
+                <a:spcPts val="120"/>
+              </a:spcBef>
+              <a:buNone/>
+            </a:pPr>
+            <a:r>
+              <a:rPr lang="en-US" sz="950" kern="0" dirty="0">
+                <a:solidFill>
+                  <a:srgbClr val="A7A296"/>
+                </a:solidFill>
+                <a:latin typeface="Calibri" pitchFamily="34" charset="0"/>
+                <a:cs typeface="Calibri" pitchFamily="34" charset="0"/>
+              </a:rPr>
+              <a:t>Tanjong Pagar — steps from dining, MRT &amp; the CBD</a:t>
+            </a:r>
+          </a:p>
+          <a:p>
+            <a:pPr marL="0" indent="0" algn="l">
+              <a:lnSpc>
+                <a:spcPct val="100000"/>
+              </a:lnSpc>
+              <a:spcBef>
+                <a:spcPts val="600"/>
+              </a:spcBef>
+              <a:buNone/>
+            </a:pPr>
+            <a:r>
+              <a:rPr lang="en-US" sz="1100" b="1" kern="0" dirty="0">
+                <a:solidFill>
+                  <a:srgbClr val="F2EEE6"/>
+                </a:solidFill>
+                <a:latin typeface="Calibri" pitchFamily="34" charset="0"/>
+                <a:cs typeface="Calibri" pitchFamily="34" charset="0"/>
+              </a:rPr>
+              <a:t>Club Lounge access</a:t>
+            </a:r>
+          </a:p>
+          <a:p>
+            <a:pPr marL="0" indent="0" algn="l">
+              <a:lnSpc>
+                <a:spcPct val="100000"/>
+              </a:lnSpc>
+              <a:spcBef>
+                <a:spcPts val="120"/>
+              </a:spcBef>
+              <a:buNone/>
+            </a:pPr>
+            <a:r>
+              <a:rPr lang="en-US" sz="950" kern="0" dirty="0">
+                <a:solidFill>
+                  <a:srgbClr val="A7A296"/>
+                </a:solidFill>
+                <a:latin typeface="Calibri" pitchFamily="34" charset="0"/>
+                <a:cs typeface="Calibri" pitchFamily="34" charset="0"/>
+              </a:rPr>
+              <a:t>Breakfast, evening cocktails &amp; canapés included daily</a:t>
+            </a:r>
+          </a:p>
+          <a:p>
+            <a:pPr marL="0" indent="0" algn="l">
+              <a:lnSpc>
+                <a:spcPct val="100000"/>
+              </a:lnSpc>
+              <a:spcBef>
+                <a:spcPts val="600"/>
+              </a:spcBef>
+              <a:buNone/>
+            </a:pPr>
+            <a:r>
+              <a:rPr lang="en-US" sz="1100" b="1" kern="0" dirty="0">
+                <a:solidFill>
+                  <a:srgbClr val="F2EEE6"/>
+                </a:solidFill>
+                <a:latin typeface="Calibri" pitchFamily="34" charset="0"/>
+                <a:cs typeface="Calibri" pitchFamily="34" charset="0"/>
+              </a:rPr>
+              <a:t>All-day dining credit</a:t>
+            </a:r>
+          </a:p>
+          <a:p>
+            <a:pPr marL="0" indent="0" algn="l">
+              <a:lnSpc>
+                <a:spcPct val="100000"/>
+              </a:lnSpc>
+              <a:spcBef>
+                <a:spcPts val="120"/>
+              </a:spcBef>
+              <a:buNone/>
+            </a:pPr>
+            <a:r>
+              <a:rPr lang="en-US" sz="950" kern="0" dirty="0">
+                <a:solidFill>
+                  <a:srgbClr val="A7A296"/>
+                </a:solidFill>
+                <a:latin typeface="Calibri" pitchFamily="34" charset="0"/>
+                <a:cs typeface="Calibri" pitchFamily="34" charset="0"/>
+              </a:rPr>
+              <a:t>One-time credit to spend at Element or Cafe Oriental</a:t>
+            </a:r>
+          </a:p>
+          <a:p>
+            <a:pPr marL="0" indent="0" algn="l">
+              <a:lnSpc>
+                <a:spcPct val="100000"/>
+              </a:lnSpc>
+              <a:spcBef>
+                <a:spcPts val="600"/>
+              </a:spcBef>
+              <a:buNone/>
+            </a:pPr>
+            <a:r>
+              <a:rPr lang="en-US" sz="1100" b="1" kern="0" dirty="0">
+                <a:solidFill>
+                  <a:srgbClr val="F2EEE6"/>
+                </a:solidFill>
+                <a:latin typeface="Calibri" pitchFamily="34" charset="0"/>
+                <a:cs typeface="Calibri" pitchFamily="34" charset="0"/>
+              </a:rPr>
+              <a:t>Relaxed check-out</a:t>
+            </a:r>
+          </a:p>
+          <a:p>
+            <a:pPr marL="0" indent="0" algn="l">
+              <a:lnSpc>
+                <a:spcPct val="100000"/>
+              </a:lnSpc>
+              <a:spcBef>
+                <a:spcPts val="120"/>
+              </a:spcBef>
+              <a:buNone/>
+            </a:pPr>
+            <a:r>
+              <a:rPr lang="en-US" sz="950" kern="0" dirty="0">
+                <a:solidFill>
+                  <a:srgbClr val="A7A296"/>
+                </a:solidFill>
+                <a:latin typeface="Calibri" pitchFamily="34" charset="0"/>
+                <a:cs typeface="Calibri" pitchFamily="34" charset="0"/>
+              </a:rPr>
+              <a:t>Late 2pm check-out to ease into your day</a:t>
+            </a:r>
+          </a:p>
+        </p:txBody>
+      </p:sp>
+      <p:sp>
+        <p:nvSpPr>
+          <p:cNvPr id="24" name="tb"/>
+          <p:cNvSpPr/>
+          <p:nvPr/>
+        </p:nvSpPr>
+        <p:spPr>
+          <a:xfrm>
+            <a:off x="822960" y="6520000"/>
+            <a:ext cx="5400000" cy="240000"/>
+          </a:xfrm>
+          <a:prstGeom prst="rect">
+            <a:avLst/>
+          </a:prstGeom>
+          <a:noFill/>
+        </p:spPr>
+        <p:txBody>
+          <a:bodyPr wrap="square" lIns="0" tIns="0" rIns="0" bIns="0" rtlCol="0" anchor="t"/>
+          <a:lstStyle/>
+          <a:p>
+            <a:pPr marL="0" indent="0" algn="l">
+              <a:buNone/>
+            </a:pPr>
+            <a:r>
+              <a:rPr lang="en-US" sz="900" i="1" kern="0" dirty="0">
+                <a:solidFill>
+                  <a:srgbClr val="A7A296"/>
+                </a:solidFill>
+                <a:latin typeface="Calibri" pitchFamily="34" charset="0"/>
+                <a:cs typeface="Calibri" pitchFamily="34" charset="0"/>
+              </a:rPr>
+              <a:t>Pay with AsiaGO! Pass Credits  ·  AsiaGO Hotel Collection</a:t>
+            </a:r>
+          </a:p>
+        </p:txBody>
+      </p:sp>
+      <p:sp>
+        <p:nvSpPr>
+          <p:cNvPr id="25" name="tb"/>
+          <p:cNvSpPr/>
+          <p:nvPr/>
+        </p:nvSpPr>
+        <p:spPr>
+          <a:xfrm>
+            <a:off x="8369040" y="6520000"/>
+            <a:ext cx="3000000" cy="240000"/>
+          </a:xfrm>
+          <a:prstGeom prst="rect">
+            <a:avLst/>
+          </a:prstGeom>
+          <a:noFill/>
+        </p:spPr>
+        <p:txBody>
+          <a:bodyPr wrap="square" lIns="0" tIns="0" rIns="0" bIns="0" rtlCol="0" anchor="t"/>
+          <a:lstStyle/>
+          <a:p>
+            <a:pPr marL="0" indent="0" algn="r">
+              <a:buNone/>
+            </a:pPr>
+            <a:r>
+              <a:rPr lang="en-US" sz="950" b="1" spc="100" kern="0" dirty="0">
+                <a:solidFill>
+                  <a:srgbClr val="C8A24A"/>
+                </a:solidFill>
+                <a:latin typeface="Calibri" pitchFamily="34" charset="0"/>
+                <a:cs typeface="Calibri" pitchFamily="34" charset="0"/>
+              </a:rPr>
+              <a:t>AsiaGO! Pass</a:t>
+            </a:r>
+          </a:p>
+        </p:txBody>
+      </p:sp>
+    </p:spTree>
+  </p:cSld>
+  <p:clrMapOvr>
+    <a:masterClrMapping/>
+  </p:clrMapOvr>
+</p:sld>
+</file>
+
+<file path=ppt/slides/slide28.xml><?xml version="1.0" encoding="utf-8"?>
+<p:sld xmlns:a="http://schemas.openxmlformats.org/drawingml/2006/main" xmlns:r="http://schemas.openxmlformats.org/officeDocument/2006/relationships" xmlns:p="http://schemas.openxmlformats.org/presentationml/2006/main">
+  <p:cSld>
+    <p:bg>
+      <p:bgPr>
+        <a:solidFill>
+          <a:srgbClr val="121316"/>
+        </a:solidFill>
+        <a:effectLst/>
+      </p:bgPr>
+    </p:bg>
+    <p:spTree>
+      <p:nvGrpSpPr>
+        <p:cNvPr id="1" name=""/>
+        <p:cNvGrpSpPr/>
+        <p:nvPr/>
+      </p:nvGrpSpPr>
+      <p:grpSpPr>
+        <a:xfrm>
+          <a:off x="0" y="0"/>
+          <a:ext cx="0" cy="0"/>
+          <a:chOff x="0" y="0"/>
+          <a:chExt cx="0" cy="0"/>
+        </a:xfrm>
+      </p:grpSpPr>
+      <p:sp>
+        <p:nvSpPr>
+          <p:cNvPr id="11" name="r"/>
+          <p:cNvSpPr/>
+          <p:nvPr/>
+        </p:nvSpPr>
+        <p:spPr>
+          <a:xfrm>
+            <a:off x="0" y="0"/>
+            <a:ext cx="12192000" cy="1990000"/>
+          </a:xfrm>
+          <a:prstGeom prst="rect">
+            <a:avLst/>
+          </a:prstGeom>
+          <a:gradFill>
+            <a:gsLst>
+              <a:gs pos="0">
+                <a:srgbClr val="0F2E1E"/>
+              </a:gs>
+              <a:gs pos="55000">
+                <a:srgbClr val="1D6E4A"/>
+              </a:gs>
+              <a:gs pos="100000">
+                <a:srgbClr val="3B6D11"/>
+              </a:gs>
+            </a:gsLst>
+            <a:lin ang="2700000" scaled="1"/>
+          </a:gradFill>
+        </p:spPr>
+        <p:txBody>
+          <a:bodyPr/>
+          <a:lstStyle/>
+          <a:p>
+            <a:endParaRPr lang="en-US"/>
+          </a:p>
+        </p:txBody>
+      </p:sp>
+      <p:sp>
+        <p:nvSpPr>
+          <p:cNvPr id="12" name="tb"/>
+          <p:cNvSpPr/>
+          <p:nvPr/>
+        </p:nvSpPr>
+        <p:spPr>
+          <a:xfrm>
+            <a:off x="822960" y="300000"/>
+            <a:ext cx="9000000" cy="260000"/>
+          </a:xfrm>
+          <a:prstGeom prst="rect">
+            <a:avLst/>
+          </a:prstGeom>
+          <a:noFill/>
+        </p:spPr>
+        <p:txBody>
+          <a:bodyPr wrap="square" lIns="0" tIns="0" rIns="0" bIns="0" rtlCol="0" anchor="t"/>
+          <a:lstStyle/>
+          <a:p>
+            <a:pPr marL="0" indent="0" algn="l">
+              <a:buNone/>
+            </a:pPr>
+            <a:r>
+              <a:rPr lang="en-US" sz="1050" b="1" spc="300" kern="0" dirty="0">
+                <a:solidFill>
+                  <a:srgbClr val="FFFFFF"/>
+                </a:solidFill>
+                <a:latin typeface="Calibri" pitchFamily="34" charset="0"/>
+                <a:cs typeface="Calibri" pitchFamily="34" charset="0"/>
+              </a:rPr>
+              <a:t>AsiaGO PASS  ·  HOTEL COLLECTION</a:t>
+            </a:r>
+          </a:p>
+        </p:txBody>
+      </p:sp>
+      <p:sp>
+        <p:nvSpPr>
+          <p:cNvPr id="13" name="tb"/>
+          <p:cNvSpPr/>
+          <p:nvPr/>
+        </p:nvSpPr>
+        <p:spPr>
+          <a:xfrm>
+            <a:off x="822960" y="610000"/>
+            <a:ext cx="10000000" cy="840000"/>
+          </a:xfrm>
+          <a:prstGeom prst="rect">
+            <a:avLst/>
+          </a:prstGeom>
+          <a:noFill/>
+        </p:spPr>
+        <p:txBody>
+          <a:bodyPr wrap="square" lIns="0" tIns="0" rIns="0" bIns="0" rtlCol="0" anchor="t"/>
+          <a:lstStyle/>
+          <a:p>
+            <a:pPr marL="0" indent="0" algn="l">
+              <a:lnSpc>
+                <a:spcPct val="100000"/>
+              </a:lnSpc>
+              <a:buNone/>
+            </a:pPr>
+            <a:r>
+              <a:rPr lang="en-US" sz="3000" b="1" kern="0" dirty="0">
+                <a:solidFill>
+                  <a:srgbClr val="FFFFFF"/>
+                </a:solidFill>
+                <a:latin typeface="Georgia" pitchFamily="34" charset="0"/>
+                <a:cs typeface="Georgia" pitchFamily="34" charset="0"/>
+              </a:rPr>
+              <a:t>Mandai Rainforest Resort</a:t>
+            </a:r>
+          </a:p>
+        </p:txBody>
+      </p:sp>
+      <p:sp>
+        <p:nvSpPr>
+          <p:cNvPr id="14" name="tb"/>
+          <p:cNvSpPr/>
+          <p:nvPr/>
+        </p:nvSpPr>
+        <p:spPr>
+          <a:xfrm>
+            <a:off x="822960" y="1480000"/>
+            <a:ext cx="9600000" cy="440000"/>
+          </a:xfrm>
+          <a:prstGeom prst="rect">
+            <a:avLst/>
+          </a:prstGeom>
+          <a:noFill/>
+        </p:spPr>
+        <p:txBody>
+          <a:bodyPr wrap="square" lIns="0" tIns="0" rIns="0" bIns="0" rtlCol="0" anchor="t"/>
+          <a:lstStyle/>
+          <a:p>
+            <a:pPr marL="0" indent="0" algn="l">
+              <a:lnSpc>
+                <a:spcPct val="104000"/>
+              </a:lnSpc>
+              <a:buNone/>
+            </a:pPr>
+            <a:r>
+              <a:rPr lang="en-US" sz="1250" kern="0" dirty="0">
+                <a:solidFill>
+                  <a:srgbClr val="FFFFFF"/>
+                </a:solidFill>
+                <a:latin typeface="Calibri" pitchFamily="34" charset="0"/>
+                <a:cs typeface="Calibri" pitchFamily="34" charset="0"/>
+              </a:rPr>
+              <a:t>by Banyan Tree · Sanctuary Room — Singapore's only rainforest resort, wrapped in wildlife and greenery.</a:t>
+            </a:r>
+          </a:p>
+        </p:txBody>
+      </p:sp>
+      <p:sp>
+        <p:nvSpPr>
+          <p:cNvPr id="15" name="card"/>
+          <p:cNvSpPr/>
+          <p:nvPr/>
+        </p:nvSpPr>
+        <p:spPr>
+          <a:xfrm>
+            <a:off x="822960" y="2150000"/>
+            <a:ext cx="3355360" cy="950000"/>
+          </a:xfrm>
+          <a:prstGeom prst="roundRect">
+            <a:avLst>
+              <a:gd name="adj" fmla="val 6000"/>
+            </a:avLst>
+          </a:prstGeom>
+          <a:solidFill>
+            <a:srgbClr val="1C1F24"/>
+          </a:solidFill>
+          <a:ln w="12700">
+            <a:solidFill>
+              <a:srgbClr val="1D9E75"/>
+            </a:solidFill>
+            <a:prstDash val="solid"/>
+          </a:ln>
+        </p:spPr>
+        <p:txBody>
+          <a:bodyPr wrap="square" lIns="137160" tIns="68580" rIns="137160" bIns="68580" rtlCol="0" anchor="ctr"/>
+          <a:lstStyle/>
+          <a:p>
+            <a:pPr marL="0" indent="0" algn="l">
+              <a:lnSpc>
+                <a:spcPct val="100000"/>
+              </a:lnSpc>
+              <a:buNone/>
+            </a:pPr>
+            <a:r>
+              <a:rPr lang="en-US" sz="1000" b="1" spc="200" kern="0" dirty="0">
+                <a:solidFill>
+                  <a:srgbClr val="1D9E75"/>
+                </a:solidFill>
+                <a:latin typeface="Calibri" pitchFamily="34" charset="0"/>
+                <a:cs typeface="Calibri" pitchFamily="34" charset="0"/>
+              </a:rPr>
+              <a:t>STAY</a:t>
+            </a:r>
+          </a:p>
+          <a:p>
+            <a:pPr marL="0" indent="0" algn="l">
+              <a:lnSpc>
+                <a:spcPct val="100000"/>
+              </a:lnSpc>
+              <a:spcBef>
+                <a:spcPts val="200"/>
+              </a:spcBef>
+              <a:buNone/>
+            </a:pPr>
+            <a:r>
+              <a:rPr lang="en-US" sz="1600" b="1" kern="0" dirty="0">
+                <a:solidFill>
+                  <a:srgbClr val="F2EEE6"/>
+                </a:solidFill>
+                <a:latin typeface="Calibri" pitchFamily="34" charset="0"/>
+                <a:cs typeface="Calibri" pitchFamily="34" charset="0"/>
+              </a:rPr>
+              <a:t>3 Nights</a:t>
+            </a:r>
+          </a:p>
+          <a:p>
+            <a:pPr marL="0" indent="0" algn="l">
+              <a:lnSpc>
+                <a:spcPct val="100000"/>
+              </a:lnSpc>
+              <a:spcBef>
+                <a:spcPts val="200"/>
+              </a:spcBef>
+              <a:buNone/>
+            </a:pPr>
+            <a:r>
+              <a:rPr lang="en-US" sz="850" kern="0" dirty="0">
+                <a:solidFill>
+                  <a:srgbClr val="A7A296"/>
+                </a:solidFill>
+                <a:latin typeface="Calibri" pitchFamily="34" charset="0"/>
+                <a:cs typeface="Calibri" pitchFamily="34" charset="0"/>
+              </a:rPr>
+              <a:t>minimum stay</a:t>
+            </a:r>
+          </a:p>
+        </p:txBody>
+      </p:sp>
+      <p:sp>
+        <p:nvSpPr>
+          <p:cNvPr id="16" name="card"/>
+          <p:cNvSpPr/>
+          <p:nvPr/>
+        </p:nvSpPr>
+        <p:spPr>
+          <a:xfrm>
+            <a:off x="4418320" y="2150000"/>
+            <a:ext cx="3355360" cy="950000"/>
+          </a:xfrm>
+          <a:prstGeom prst="roundRect">
+            <a:avLst>
+              <a:gd name="adj" fmla="val 6000"/>
+            </a:avLst>
+          </a:prstGeom>
+          <a:solidFill>
+            <a:srgbClr val="1C1F24"/>
+          </a:solidFill>
+          <a:ln w="12700">
+            <a:solidFill>
+              <a:srgbClr val="1D9E75"/>
+            </a:solidFill>
+            <a:prstDash val="solid"/>
+          </a:ln>
+        </p:spPr>
+        <p:txBody>
+          <a:bodyPr wrap="square" lIns="137160" tIns="68580" rIns="137160" bIns="68580" rtlCol="0" anchor="ctr"/>
+          <a:lstStyle/>
+          <a:p>
+            <a:pPr marL="0" indent="0" algn="l">
+              <a:lnSpc>
+                <a:spcPct val="100000"/>
+              </a:lnSpc>
+              <a:buNone/>
+            </a:pPr>
+            <a:r>
+              <a:rPr lang="en-US" sz="1000" b="1" spc="200" kern="0" dirty="0">
+                <a:solidFill>
+                  <a:srgbClr val="1D9E75"/>
+                </a:solidFill>
+                <a:latin typeface="Calibri" pitchFamily="34" charset="0"/>
+                <a:cs typeface="Calibri" pitchFamily="34" charset="0"/>
+              </a:rPr>
+              <a:t>ROOM</a:t>
+            </a:r>
+          </a:p>
+          <a:p>
+            <a:pPr marL="0" indent="0" algn="l">
+              <a:lnSpc>
+                <a:spcPct val="100000"/>
+              </a:lnSpc>
+              <a:spcBef>
+                <a:spcPts val="200"/>
+              </a:spcBef>
+              <a:buNone/>
+            </a:pPr>
+            <a:r>
+              <a:rPr lang="en-US" sz="1500" b="1" kern="0" dirty="0">
+                <a:solidFill>
+                  <a:srgbClr val="F2EEE6"/>
+                </a:solidFill>
+                <a:latin typeface="Calibri" pitchFamily="34" charset="0"/>
+                <a:cs typeface="Calibri" pitchFamily="34" charset="0"/>
+              </a:rPr>
+              <a:t>Sanctuary Room</a:t>
+            </a:r>
+          </a:p>
+          <a:p>
+            <a:pPr marL="0" indent="0" algn="l">
+              <a:lnSpc>
+                <a:spcPct val="100000"/>
+              </a:lnSpc>
+              <a:spcBef>
+                <a:spcPts val="200"/>
+              </a:spcBef>
+              <a:buNone/>
+            </a:pPr>
+            <a:r>
+              <a:rPr lang="en-US" sz="850" kern="0" dirty="0">
+                <a:solidFill>
+                  <a:srgbClr val="A7A296"/>
+                </a:solidFill>
+                <a:latin typeface="Calibri" pitchFamily="34" charset="0"/>
+                <a:cs typeface="Calibri" pitchFamily="34" charset="0"/>
+              </a:rPr>
+              <a:t>Double or King</a:t>
+            </a:r>
+          </a:p>
+        </p:txBody>
+      </p:sp>
+      <p:sp>
+        <p:nvSpPr>
+          <p:cNvPr id="17" name="card"/>
+          <p:cNvSpPr/>
+          <p:nvPr/>
+        </p:nvSpPr>
+        <p:spPr>
+          <a:xfrm>
+            <a:off x="8013680" y="2150000"/>
+            <a:ext cx="3355360" cy="950000"/>
+          </a:xfrm>
+          <a:prstGeom prst="roundRect">
+            <a:avLst>
+              <a:gd name="adj" fmla="val 6000"/>
+            </a:avLst>
+          </a:prstGeom>
+          <a:solidFill>
+            <a:srgbClr val="23201A"/>
+          </a:solidFill>
+          <a:ln w="15875">
+            <a:solidFill>
+              <a:srgbClr val="C8A24A"/>
+            </a:solidFill>
+            <a:prstDash val="solid"/>
+          </a:ln>
+        </p:spPr>
+        <p:txBody>
+          <a:bodyPr wrap="square" lIns="137160" tIns="68580" rIns="137160" bIns="68580" rtlCol="0" anchor="ctr"/>
+          <a:lstStyle/>
+          <a:p>
+            <a:pPr marL="0" indent="0" algn="l">
+              <a:lnSpc>
+                <a:spcPct val="100000"/>
+              </a:lnSpc>
+              <a:buNone/>
+            </a:pPr>
+            <a:r>
+              <a:rPr lang="en-US" sz="1000" b="1" spc="200" kern="0" dirty="0">
+                <a:solidFill>
+                  <a:srgbClr val="E6CE8F"/>
+                </a:solidFill>
+                <a:latin typeface="Calibri" pitchFamily="34" charset="0"/>
+                <a:cs typeface="Calibri" pitchFamily="34" charset="0"/>
+              </a:rPr>
+              <a:t>FROM</a:t>
+            </a:r>
+          </a:p>
+          <a:p>
+            <a:pPr marL="0" indent="0" algn="l">
+              <a:lnSpc>
+                <a:spcPct val="100000"/>
+              </a:lnSpc>
+              <a:spcBef>
+                <a:spcPts val="200"/>
+              </a:spcBef>
+              <a:buNone/>
+            </a:pPr>
+            <a:r>
+              <a:rPr lang="en-US" sz="2400" b="1" kern="0" dirty="0">
+                <a:solidFill>
+                  <a:srgbClr val="F2EEE6"/>
+                </a:solidFill>
+                <a:latin typeface="Georgia" pitchFamily="34" charset="0"/>
+                <a:cs typeface="Georgia" pitchFamily="34" charset="0"/>
+              </a:rPr>
+              <a:t>1,998</a:t>
+            </a:r>
+          </a:p>
+          <a:p>
+            <a:pPr marL="0" indent="0" algn="l">
+              <a:lnSpc>
+                <a:spcPct val="100000"/>
+              </a:lnSpc>
+              <a:spcBef>
+                <a:spcPts val="200"/>
+              </a:spcBef>
+              <a:buNone/>
+            </a:pPr>
+            <a:r>
+              <a:rPr lang="en-US" sz="850" kern="0" dirty="0">
+                <a:solidFill>
+                  <a:srgbClr val="A7A296"/>
+                </a:solidFill>
+                <a:latin typeface="Calibri" pitchFamily="34" charset="0"/>
+                <a:cs typeface="Calibri" pitchFamily="34" charset="0"/>
+              </a:rPr>
+              <a:t>AsiaGO! Pass Credits, total</a:t>
+            </a:r>
+          </a:p>
+        </p:txBody>
+      </p:sp>
+      <p:sp>
+        <p:nvSpPr>
+          <p:cNvPr id="18" name="r"/>
+          <p:cNvSpPr/>
+          <p:nvPr/>
+        </p:nvSpPr>
+        <p:spPr>
+          <a:xfrm>
+            <a:off x="822960" y="3370000"/>
+            <a:ext cx="360000" cy="45720"/>
+          </a:xfrm>
+          <a:prstGeom prst="rect">
+            <a:avLst/>
+          </a:prstGeom>
+          <a:solidFill>
+            <a:srgbClr val="1D9E75"/>
+          </a:solidFill>
+        </p:spPr>
+        <p:txBody>
+          <a:bodyPr/>
+          <a:lstStyle/>
+          <a:p>
+            <a:endParaRPr lang="en-US"/>
+          </a:p>
+        </p:txBody>
+      </p:sp>
+      <p:sp>
+        <p:nvSpPr>
+          <p:cNvPr id="19" name="tb"/>
+          <p:cNvSpPr/>
+          <p:nvPr/>
+        </p:nvSpPr>
+        <p:spPr>
+          <a:xfrm>
+            <a:off x="1262960" y="3340000"/>
+            <a:ext cx="5740000" cy="250000"/>
+          </a:xfrm>
+          <a:prstGeom prst="rect">
+            <a:avLst/>
+          </a:prstGeom>
+          <a:noFill/>
+        </p:spPr>
+        <p:txBody>
+          <a:bodyPr wrap="square" lIns="0" tIns="0" rIns="0" bIns="0" rtlCol="0" anchor="t"/>
+          <a:lstStyle/>
+          <a:p>
+            <a:pPr marL="0" indent="0" algn="l">
+              <a:buNone/>
+            </a:pPr>
+            <a:r>
+              <a:rPr lang="en-US" sz="1100" b="1" spc="280" kern="0" dirty="0">
+                <a:solidFill>
+                  <a:srgbClr val="C8A24A"/>
+                </a:solidFill>
+                <a:latin typeface="Calibri" pitchFamily="34" charset="0"/>
+                <a:cs typeface="Calibri" pitchFamily="34" charset="0"/>
+              </a:rPr>
+              <a:t>WHAT'S INCLUDED</a:t>
+            </a:r>
+          </a:p>
+        </p:txBody>
+      </p:sp>
+      <p:sp>
+        <p:nvSpPr>
+          <p:cNvPr id="20" name="r"/>
+          <p:cNvSpPr/>
+          <p:nvPr/>
+        </p:nvSpPr>
+        <p:spPr>
+          <a:xfrm>
+            <a:off x="7362960" y="3370000"/>
+            <a:ext cx="360000" cy="45720"/>
+          </a:xfrm>
+          <a:prstGeom prst="rect">
+            <a:avLst/>
+          </a:prstGeom>
+          <a:solidFill>
+            <a:srgbClr val="1D9E75"/>
+          </a:solidFill>
+        </p:spPr>
+        <p:txBody>
+          <a:bodyPr/>
+          <a:lstStyle/>
+          <a:p>
+            <a:endParaRPr lang="en-US"/>
+          </a:p>
+        </p:txBody>
+      </p:sp>
+      <p:sp>
+        <p:nvSpPr>
+          <p:cNvPr id="21" name="tb"/>
+          <p:cNvSpPr/>
+          <p:nvPr/>
+        </p:nvSpPr>
+        <p:spPr>
+          <a:xfrm>
+            <a:off x="7802960" y="3340000"/>
+            <a:ext cx="3566080" cy="250000"/>
+          </a:xfrm>
+          <a:prstGeom prst="rect">
+            <a:avLst/>
+          </a:prstGeom>
+          <a:noFill/>
+        </p:spPr>
+        <p:txBody>
+          <a:bodyPr wrap="square" lIns="0" tIns="0" rIns="0" bIns="0" rtlCol="0" anchor="t"/>
+          <a:lstStyle/>
+          <a:p>
+            <a:pPr marL="0" indent="0" algn="l">
+              <a:buNone/>
+            </a:pPr>
+            <a:r>
+              <a:rPr lang="en-US" sz="1100" b="1" spc="240" kern="0" dirty="0">
+                <a:solidFill>
+                  <a:srgbClr val="C8A24A"/>
+                </a:solidFill>
+                <a:latin typeface="Calibri" pitchFamily="34" charset="0"/>
+                <a:cs typeface="Calibri" pitchFamily="34" charset="0"/>
+              </a:rPr>
+              <a:t>WHY GUESTS LOVE IT</a:t>
+            </a:r>
+          </a:p>
+        </p:txBody>
+      </p:sp>
+      <p:sp>
+        <p:nvSpPr>
+          <p:cNvPr id="22" name="tb"/>
+          <p:cNvSpPr/>
+          <p:nvPr/>
+        </p:nvSpPr>
+        <p:spPr>
+          <a:xfrm>
+            <a:off x="822960" y="3670000"/>
+            <a:ext cx="6180000" cy="3000000"/>
+          </a:xfrm>
+          <a:prstGeom prst="rect">
+            <a:avLst/>
+          </a:prstGeom>
+          <a:noFill/>
+        </p:spPr>
+        <p:txBody>
+          <a:bodyPr wrap="square" lIns="0" tIns="0" rIns="0" bIns="0" rtlCol="0" anchor="t"/>
+          <a:lstStyle/>
+          <a:p>
+            <a:pPr marL="200000" indent="-200000" algn="l">
+              <a:lnSpc>
+                <a:spcPct val="100000"/>
+              </a:lnSpc>
+              <a:spcBef>
+                <a:spcPts val="400"/>
+              </a:spcBef>
+              <a:buClr>
+                <a:srgbClr val="1D9E75"/>
+              </a:buClr>
+              <a:buFont typeface="Arial"/>
+              <a:buChar char="▸"/>
+            </a:pPr>
+            <a:r>
+              <a:rPr lang="en-US" sz="1050" kern="0" dirty="0">
+                <a:solidFill>
+                  <a:srgbClr val="F2EEE6"/>
+                </a:solidFill>
+                <a:latin typeface="Calibri" pitchFamily="34" charset="0"/>
+                <a:cs typeface="Calibri" pitchFamily="34" charset="0"/>
+              </a:rPr>
+              <a:t>Daily breakfast for 2</a:t>
+            </a:r>
+          </a:p>
+          <a:p>
+            <a:pPr marL="200000" indent="-200000" algn="l">
+              <a:lnSpc>
+                <a:spcPct val="100000"/>
+              </a:lnSpc>
+              <a:spcBef>
+                <a:spcPts val="400"/>
+              </a:spcBef>
+              <a:buClr>
+                <a:srgbClr val="1D9E75"/>
+              </a:buClr>
+              <a:buFont typeface="Arial"/>
+              <a:buChar char="▸"/>
+            </a:pPr>
+            <a:r>
+              <a:rPr lang="en-US" sz="1050" kern="0" dirty="0">
+                <a:solidFill>
+                  <a:srgbClr val="F2EEE6"/>
+                </a:solidFill>
+                <a:latin typeface="Calibri" pitchFamily="34" charset="0"/>
+                <a:cs typeface="Calibri" pitchFamily="34" charset="0"/>
+              </a:rPr>
+              <a:t>Afternoon tea with reservoir &amp; jungle views</a:t>
+            </a:r>
+          </a:p>
+          <a:p>
+            <a:pPr marL="200000" indent="-200000" algn="l">
+              <a:lnSpc>
+                <a:spcPct val="100000"/>
+              </a:lnSpc>
+              <a:spcBef>
+                <a:spcPts val="400"/>
+              </a:spcBef>
+              <a:buClr>
+                <a:srgbClr val="1D9E75"/>
+              </a:buClr>
+              <a:buFont typeface="Arial"/>
+              <a:buChar char="▸"/>
+            </a:pPr>
+            <a:r>
+              <a:rPr lang="en-US" sz="1050" kern="0" dirty="0">
+                <a:solidFill>
+                  <a:srgbClr val="F2EEE6"/>
+                </a:solidFill>
+                <a:latin typeface="Calibri" pitchFamily="34" charset="0"/>
+                <a:cs typeface="Calibri" pitchFamily="34" charset="0"/>
+              </a:rPr>
+              <a:t>Complimentary welcome drink &amp; in-room minibar</a:t>
+            </a:r>
+          </a:p>
+          <a:p>
+            <a:pPr marL="200000" indent="-200000" algn="l">
+              <a:lnSpc>
+                <a:spcPct val="100000"/>
+              </a:lnSpc>
+              <a:spcBef>
+                <a:spcPts val="400"/>
+              </a:spcBef>
+              <a:buClr>
+                <a:srgbClr val="1D9E75"/>
+              </a:buClr>
+              <a:buFont typeface="Arial"/>
+              <a:buChar char="▸"/>
+            </a:pPr>
+            <a:r>
+              <a:rPr lang="en-US" sz="1050" kern="0" dirty="0">
+                <a:solidFill>
+                  <a:srgbClr val="F2EEE6"/>
+                </a:solidFill>
+                <a:latin typeface="Calibri" pitchFamily="34" charset="0"/>
+                <a:cs typeface="Calibri" pitchFamily="34" charset="0"/>
+              </a:rPr>
+              <a:t>Late check-out (subject to availability)</a:t>
+            </a:r>
+          </a:p>
+          <a:p>
+            <a:pPr marL="200000" indent="-200000" algn="l">
+              <a:lnSpc>
+                <a:spcPct val="100000"/>
+              </a:lnSpc>
+              <a:spcBef>
+                <a:spcPts val="400"/>
+              </a:spcBef>
+              <a:buClr>
+                <a:srgbClr val="1D9E75"/>
+              </a:buClr>
+              <a:buFont typeface="Arial"/>
+              <a:buChar char="▸"/>
+            </a:pPr>
+            <a:r>
+              <a:rPr lang="en-US" sz="1050" kern="0" dirty="0">
+                <a:solidFill>
+                  <a:srgbClr val="F2EEE6"/>
+                </a:solidFill>
+                <a:latin typeface="Calibri" pitchFamily="34" charset="0"/>
+                <a:cs typeface="Calibri" pitchFamily="34" charset="0"/>
+              </a:rPr>
+              <a:t>Rainforest Wild Adventure + Adventure+ for 2 (1-day)</a:t>
+            </a:r>
+          </a:p>
+          <a:p>
+            <a:pPr marL="200000" indent="-200000" algn="l">
+              <a:lnSpc>
+                <a:spcPct val="100000"/>
+              </a:lnSpc>
+              <a:spcBef>
+                <a:spcPts val="400"/>
+              </a:spcBef>
+              <a:buClr>
+                <a:srgbClr val="1D9E75"/>
+              </a:buClr>
+              <a:buFont typeface="Arial"/>
+              <a:buChar char="▸"/>
+            </a:pPr>
+            <a:r>
+              <a:rPr lang="en-US" sz="1050" kern="0" dirty="0">
+                <a:solidFill>
+                  <a:srgbClr val="F2EEE6"/>
+                </a:solidFill>
+                <a:latin typeface="Calibri" pitchFamily="34" charset="0"/>
+                <a:cs typeface="Calibri" pitchFamily="34" charset="0"/>
+              </a:rPr>
+              <a:t>5 wildlife parks — Night Safari, Bird Paradise, Rainforest Wild Asia, Zoo &amp; River Wonders</a:t>
+            </a:r>
+          </a:p>
+        </p:txBody>
+      </p:sp>
+      <p:sp>
+        <p:nvSpPr>
+          <p:cNvPr id="23" name="tb"/>
+          <p:cNvSpPr/>
+          <p:nvPr/>
+        </p:nvSpPr>
+        <p:spPr>
+          <a:xfrm>
+            <a:off x="7362960" y="3670000"/>
+            <a:ext cx="4006080" cy="3000000"/>
+          </a:xfrm>
+          <a:prstGeom prst="rect">
+            <a:avLst/>
+          </a:prstGeom>
+          <a:noFill/>
+        </p:spPr>
+        <p:txBody>
+          <a:bodyPr wrap="square" lIns="0" tIns="0" rIns="0" bIns="0" rtlCol="0" anchor="t"/>
+          <a:lstStyle/>
+          <a:p>
+            <a:pPr marL="0" indent="0" algn="l">
+              <a:lnSpc>
+                <a:spcPct val="100000"/>
+              </a:lnSpc>
+              <a:buNone/>
+            </a:pPr>
+            <a:r>
+              <a:rPr lang="en-US" sz="1100" b="1" kern="0" dirty="0">
+                <a:solidFill>
+                  <a:srgbClr val="F2EEE6"/>
+                </a:solidFill>
+                <a:latin typeface="Calibri" pitchFamily="34" charset="0"/>
+                <a:cs typeface="Calibri" pitchFamily="34" charset="0"/>
+              </a:rPr>
+              <a:t>One-of-a-kind</a:t>
+            </a:r>
+          </a:p>
+          <a:p>
+            <a:pPr marL="0" indent="0" algn="l">
+              <a:lnSpc>
+                <a:spcPct val="100000"/>
+              </a:lnSpc>
+              <a:spcBef>
+                <a:spcPts val="120"/>
+              </a:spcBef>
+              <a:buNone/>
+            </a:pPr>
+            <a:r>
+              <a:rPr lang="en-US" sz="950" kern="0" dirty="0">
+                <a:solidFill>
+                  <a:srgbClr val="A7A296"/>
+                </a:solidFill>
+                <a:latin typeface="Calibri" pitchFamily="34" charset="0"/>
+                <a:cs typeface="Calibri" pitchFamily="34" charset="0"/>
+              </a:rPr>
+              <a:t>Singapore's only resort set within the rainforest</a:t>
+            </a:r>
+          </a:p>
+          <a:p>
+            <a:pPr marL="0" indent="0" algn="l">
+              <a:lnSpc>
+                <a:spcPct val="100000"/>
+              </a:lnSpc>
+              <a:spcBef>
+                <a:spcPts val="600"/>
+              </a:spcBef>
+              <a:buNone/>
+            </a:pPr>
+            <a:r>
+              <a:rPr lang="en-US" sz="1100" b="1" kern="0" dirty="0">
+                <a:solidFill>
+                  <a:srgbClr val="F2EEE6"/>
+                </a:solidFill>
+                <a:latin typeface="Calibri" pitchFamily="34" charset="0"/>
+                <a:cs typeface="Calibri" pitchFamily="34" charset="0"/>
+              </a:rPr>
+              <a:t>Wildlife on your doorstep</a:t>
+            </a:r>
+          </a:p>
+          <a:p>
+            <a:pPr marL="0" indent="0" algn="l">
+              <a:lnSpc>
+                <a:spcPct val="100000"/>
+              </a:lnSpc>
+              <a:spcBef>
+                <a:spcPts val="120"/>
+              </a:spcBef>
+              <a:buNone/>
+            </a:pPr>
+            <a:r>
+              <a:rPr lang="en-US" sz="950" kern="0" dirty="0">
+                <a:solidFill>
+                  <a:srgbClr val="A7A296"/>
+                </a:solidFill>
+                <a:latin typeface="Calibri" pitchFamily="34" charset="0"/>
+                <a:cs typeface="Calibri" pitchFamily="34" charset="0"/>
+              </a:rPr>
+              <a:t>Five world-famous Mandai parks included</a:t>
+            </a:r>
+          </a:p>
+          <a:p>
+            <a:pPr marL="0" indent="0" algn="l">
+              <a:lnSpc>
+                <a:spcPct val="100000"/>
+              </a:lnSpc>
+              <a:spcBef>
+                <a:spcPts val="600"/>
+              </a:spcBef>
+              <a:buNone/>
+            </a:pPr>
+            <a:r>
+              <a:rPr lang="en-US" sz="1100" b="1" kern="0" dirty="0">
+                <a:solidFill>
+                  <a:srgbClr val="F2EEE6"/>
+                </a:solidFill>
+                <a:latin typeface="Calibri" pitchFamily="34" charset="0"/>
+                <a:cs typeface="Calibri" pitchFamily="34" charset="0"/>
+              </a:rPr>
+              <a:t>Nature immersion</a:t>
+            </a:r>
+          </a:p>
+          <a:p>
+            <a:pPr marL="0" indent="0" algn="l">
+              <a:lnSpc>
+                <a:spcPct val="100000"/>
+              </a:lnSpc>
+              <a:spcBef>
+                <a:spcPts val="120"/>
+              </a:spcBef>
+              <a:buNone/>
+            </a:pPr>
+            <a:r>
+              <a:rPr lang="en-US" sz="950" kern="0" dirty="0">
+                <a:solidFill>
+                  <a:srgbClr val="A7A296"/>
+                </a:solidFill>
+                <a:latin typeface="Calibri" pitchFamily="34" charset="0"/>
+                <a:cs typeface="Calibri" pitchFamily="34" charset="0"/>
+              </a:rPr>
+              <a:t>Treetop sanctuary rooms, reservoir &amp; jungle views</a:t>
+            </a:r>
+          </a:p>
+          <a:p>
+            <a:pPr marL="0" indent="0" algn="l">
+              <a:lnSpc>
+                <a:spcPct val="100000"/>
+              </a:lnSpc>
+              <a:spcBef>
+                <a:spcPts val="600"/>
+              </a:spcBef>
+              <a:buNone/>
+            </a:pPr>
+            <a:r>
+              <a:rPr lang="en-US" sz="1100" b="1" kern="0" dirty="0">
+                <a:solidFill>
+                  <a:srgbClr val="F2EEE6"/>
+                </a:solidFill>
+                <a:latin typeface="Calibri" pitchFamily="34" charset="0"/>
+                <a:cs typeface="Calibri" pitchFamily="34" charset="0"/>
+              </a:rPr>
+              <a:t>Perfect for families</a:t>
+            </a:r>
+          </a:p>
+          <a:p>
+            <a:pPr marL="0" indent="0" algn="l">
+              <a:lnSpc>
+                <a:spcPct val="100000"/>
+              </a:lnSpc>
+              <a:spcBef>
+                <a:spcPts val="120"/>
+              </a:spcBef>
+              <a:buNone/>
+            </a:pPr>
+            <a:r>
+              <a:rPr lang="en-US" sz="950" kern="0" dirty="0">
+                <a:solidFill>
+                  <a:srgbClr val="A7A296"/>
+                </a:solidFill>
+                <a:latin typeface="Calibri" pitchFamily="34" charset="0"/>
+                <a:cs typeface="Calibri" pitchFamily="34" charset="0"/>
+              </a:rPr>
+              <a:t>Adventure activities and gentle nature for all ages</a:t>
+            </a:r>
+          </a:p>
+        </p:txBody>
+      </p:sp>
+      <p:sp>
+        <p:nvSpPr>
+          <p:cNvPr id="24" name="tb"/>
+          <p:cNvSpPr/>
+          <p:nvPr/>
+        </p:nvSpPr>
+        <p:spPr>
+          <a:xfrm>
+            <a:off x="822960" y="6520000"/>
+            <a:ext cx="5400000" cy="240000"/>
+          </a:xfrm>
+          <a:prstGeom prst="rect">
+            <a:avLst/>
+          </a:prstGeom>
+          <a:noFill/>
+        </p:spPr>
+        <p:txBody>
+          <a:bodyPr wrap="square" lIns="0" tIns="0" rIns="0" bIns="0" rtlCol="0" anchor="t"/>
+          <a:lstStyle/>
+          <a:p>
+            <a:pPr marL="0" indent="0" algn="l">
+              <a:buNone/>
+            </a:pPr>
+            <a:r>
+              <a:rPr lang="en-US" sz="900" i="1" kern="0" dirty="0">
+                <a:solidFill>
+                  <a:srgbClr val="A7A296"/>
+                </a:solidFill>
+                <a:latin typeface="Calibri" pitchFamily="34" charset="0"/>
+                <a:cs typeface="Calibri" pitchFamily="34" charset="0"/>
+              </a:rPr>
+              <a:t>Pay with AsiaGO! Pass Credits  ·  AsiaGO Hotel Collection</a:t>
+            </a:r>
+          </a:p>
+        </p:txBody>
+      </p:sp>
+      <p:sp>
+        <p:nvSpPr>
+          <p:cNvPr id="25" name="tb"/>
+          <p:cNvSpPr/>
+          <p:nvPr/>
+        </p:nvSpPr>
+        <p:spPr>
+          <a:xfrm>
+            <a:off x="8369040" y="6520000"/>
+            <a:ext cx="3000000" cy="240000"/>
+          </a:xfrm>
+          <a:prstGeom prst="rect">
+            <a:avLst/>
+          </a:prstGeom>
+          <a:noFill/>
+        </p:spPr>
+        <p:txBody>
+          <a:bodyPr wrap="square" lIns="0" tIns="0" rIns="0" bIns="0" rtlCol="0" anchor="t"/>
+          <a:lstStyle/>
+          <a:p>
+            <a:pPr marL="0" indent="0" algn="r">
+              <a:buNone/>
+            </a:pPr>
+            <a:r>
+              <a:rPr lang="en-US" sz="950" b="1" spc="100" kern="0" dirty="0">
+                <a:solidFill>
+                  <a:srgbClr val="C8A24A"/>
+                </a:solidFill>
+                <a:latin typeface="Calibri" pitchFamily="34" charset="0"/>
+                <a:cs typeface="Calibri" pitchFamily="34" charset="0"/>
+              </a:rPr>
+              <a:t>AsiaGO! Pass</a:t>
+            </a:r>
+          </a:p>
+        </p:txBody>
+      </p:sp>
+    </p:spTree>
+  </p:cSld>
+  <p:clrMapOvr>
+    <a:masterClrMapping/>
+  </p:clrMapOvr>
+</p:sld>
+</file>
+
+<file path=ppt/slides/slide29.xml><?xml version="1.0" encoding="utf-8"?>
+<p:sld xmlns:a="http://schemas.openxmlformats.org/drawingml/2006/main" xmlns:r="http://schemas.openxmlformats.org/officeDocument/2006/relationships" xmlns:p="http://schemas.openxmlformats.org/presentationml/2006/main">
+  <p:cSld>
+    <p:bg>
+      <p:bgPr>
+        <a:solidFill>
+          <a:srgbClr val="121316"/>
+        </a:solidFill>
+        <a:effectLst/>
+      </p:bgPr>
+    </p:bg>
+    <p:spTree>
+      <p:nvGrpSpPr>
+        <p:cNvPr id="1" name=""/>
+        <p:cNvGrpSpPr/>
+        <p:nvPr/>
+      </p:nvGrpSpPr>
+      <p:grpSpPr>
+        <a:xfrm>
+          <a:off x="0" y="0"/>
+          <a:ext cx="0" cy="0"/>
+          <a:chOff x="0" y="0"/>
+          <a:chExt cx="0" cy="0"/>
+        </a:xfrm>
+      </p:grpSpPr>
+      <p:sp>
+        <p:nvSpPr>
+          <p:cNvPr id="11" name="r"/>
+          <p:cNvSpPr/>
+          <p:nvPr/>
+        </p:nvSpPr>
+        <p:spPr>
+          <a:xfrm>
+            <a:off x="0" y="0"/>
+            <a:ext cx="12192000" cy="1990000"/>
+          </a:xfrm>
+          <a:prstGeom prst="rect">
+            <a:avLst/>
+          </a:prstGeom>
+          <a:gradFill>
+            <a:gsLst>
+              <a:gs pos="0">
+                <a:srgbClr val="1A2140"/>
+              </a:gs>
+              <a:gs pos="55000">
+                <a:srgbClr val="3C3489"/>
+              </a:gs>
+              <a:gs pos="100000">
+                <a:srgbClr val="534AB7"/>
+              </a:gs>
+            </a:gsLst>
+            <a:lin ang="2700000" scaled="1"/>
+          </a:gradFill>
+        </p:spPr>
+        <p:txBody>
+          <a:bodyPr/>
+          <a:lstStyle/>
+          <a:p>
+            <a:endParaRPr lang="en-US"/>
+          </a:p>
+        </p:txBody>
+      </p:sp>
+      <p:sp>
+        <p:nvSpPr>
+          <p:cNvPr id="12" name="tb"/>
+          <p:cNvSpPr/>
+          <p:nvPr/>
+        </p:nvSpPr>
+        <p:spPr>
+          <a:xfrm>
+            <a:off x="822960" y="300000"/>
+            <a:ext cx="9000000" cy="260000"/>
+          </a:xfrm>
+          <a:prstGeom prst="rect">
+            <a:avLst/>
+          </a:prstGeom>
+          <a:noFill/>
+        </p:spPr>
+        <p:txBody>
+          <a:bodyPr wrap="square" lIns="0" tIns="0" rIns="0" bIns="0" rtlCol="0" anchor="t"/>
+          <a:lstStyle/>
+          <a:p>
+            <a:pPr marL="0" indent="0" algn="l">
+              <a:buNone/>
+            </a:pPr>
+            <a:r>
+              <a:rPr lang="en-US" sz="1050" b="1" spc="300" kern="0" dirty="0">
+                <a:solidFill>
+                  <a:srgbClr val="FFFFFF"/>
+                </a:solidFill>
+                <a:latin typeface="Calibri" pitchFamily="34" charset="0"/>
+                <a:cs typeface="Calibri" pitchFamily="34" charset="0"/>
+              </a:rPr>
+              <a:t>AsiaGO PASS  ·  HOTEL COLLECTION</a:t>
+            </a:r>
+          </a:p>
+        </p:txBody>
+      </p:sp>
+      <p:sp>
+        <p:nvSpPr>
+          <p:cNvPr id="13" name="tb"/>
+          <p:cNvSpPr/>
+          <p:nvPr/>
+        </p:nvSpPr>
+        <p:spPr>
+          <a:xfrm>
+            <a:off x="822960" y="610000"/>
+            <a:ext cx="10000000" cy="840000"/>
+          </a:xfrm>
+          <a:prstGeom prst="rect">
+            <a:avLst/>
+          </a:prstGeom>
+          <a:noFill/>
+        </p:spPr>
+        <p:txBody>
+          <a:bodyPr wrap="square" lIns="0" tIns="0" rIns="0" bIns="0" rtlCol="0" anchor="t"/>
+          <a:lstStyle/>
+          <a:p>
+            <a:pPr marL="0" indent="0" algn="l">
+              <a:lnSpc>
+                <a:spcPct val="100000"/>
+              </a:lnSpc>
+              <a:buNone/>
+            </a:pPr>
+            <a:r>
+              <a:rPr lang="en-US" sz="3000" b="1" kern="0" dirty="0">
+                <a:solidFill>
+                  <a:srgbClr val="FFFFFF"/>
+                </a:solidFill>
+                <a:latin typeface="Georgia" pitchFamily="34" charset="0"/>
+                <a:cs typeface="Georgia" pitchFamily="34" charset="0"/>
+              </a:rPr>
+              <a:t>RWS Stay &amp; Play</a:t>
+            </a:r>
+          </a:p>
+        </p:txBody>
+      </p:sp>
+      <p:sp>
+        <p:nvSpPr>
+          <p:cNvPr id="14" name="tb"/>
+          <p:cNvSpPr/>
+          <p:nvPr/>
+        </p:nvSpPr>
+        <p:spPr>
+          <a:xfrm>
+            <a:off x="822960" y="1480000"/>
+            <a:ext cx="9600000" cy="440000"/>
+          </a:xfrm>
+          <a:prstGeom prst="rect">
+            <a:avLst/>
+          </a:prstGeom>
+          <a:noFill/>
+        </p:spPr>
+        <p:txBody>
+          <a:bodyPr wrap="square" lIns="0" tIns="0" rIns="0" bIns="0" rtlCol="0" anchor="t"/>
+          <a:lstStyle/>
+          <a:p>
+            <a:pPr marL="0" indent="0" algn="l">
+              <a:lnSpc>
+                <a:spcPct val="104000"/>
+              </a:lnSpc>
+              <a:buNone/>
+            </a:pPr>
+            <a:r>
+              <a:rPr lang="en-US" sz="1250" kern="0" dirty="0">
+                <a:solidFill>
+                  <a:srgbClr val="FFFFFF"/>
+                </a:solidFill>
+                <a:latin typeface="Calibri" pitchFamily="34" charset="0"/>
+                <a:cs typeface="Calibri" pitchFamily="34" charset="0"/>
+              </a:rPr>
+              <a:t>Stay &amp; Play inside Resorts World Sentosa — a hotel stay plus two world-class attractions.</a:t>
+            </a:r>
+          </a:p>
+        </p:txBody>
+      </p:sp>
+      <p:sp>
+        <p:nvSpPr>
+          <p:cNvPr id="15" name="card"/>
+          <p:cNvSpPr/>
+          <p:nvPr/>
+        </p:nvSpPr>
+        <p:spPr>
+          <a:xfrm>
+            <a:off x="822960" y="2150000"/>
+            <a:ext cx="3355360" cy="950000"/>
+          </a:xfrm>
+          <a:prstGeom prst="roundRect">
+            <a:avLst>
+              <a:gd name="adj" fmla="val 6000"/>
+            </a:avLst>
+          </a:prstGeom>
+          <a:solidFill>
+            <a:srgbClr val="1C1F24"/>
+          </a:solidFill>
+          <a:ln w="12700">
+            <a:solidFill>
+              <a:srgbClr val="534AB7"/>
+            </a:solidFill>
+            <a:prstDash val="solid"/>
+          </a:ln>
+        </p:spPr>
+        <p:txBody>
+          <a:bodyPr wrap="square" lIns="137160" tIns="68580" rIns="137160" bIns="68580" rtlCol="0" anchor="ctr"/>
+          <a:lstStyle/>
+          <a:p>
+            <a:pPr marL="0" indent="0" algn="l">
+              <a:lnSpc>
+                <a:spcPct val="100000"/>
+              </a:lnSpc>
+              <a:buNone/>
+            </a:pPr>
+            <a:r>
+              <a:rPr lang="en-US" sz="1000" b="1" spc="200" kern="0" dirty="0">
+                <a:solidFill>
+                  <a:srgbClr val="534AB7"/>
+                </a:solidFill>
+                <a:latin typeface="Calibri" pitchFamily="34" charset="0"/>
+                <a:cs typeface="Calibri" pitchFamily="34" charset="0"/>
+              </a:rPr>
+              <a:t>STAY</a:t>
+            </a:r>
+          </a:p>
+          <a:p>
+            <a:pPr marL="0" indent="0" algn="l">
+              <a:lnSpc>
+                <a:spcPct val="100000"/>
+              </a:lnSpc>
+              <a:spcBef>
+                <a:spcPts val="200"/>
+              </a:spcBef>
+              <a:buNone/>
+            </a:pPr>
+            <a:r>
+              <a:rPr lang="en-US" sz="1600" b="1" kern="0" dirty="0">
+                <a:solidFill>
+                  <a:srgbClr val="F2EEE6"/>
+                </a:solidFill>
+                <a:latin typeface="Calibri" pitchFamily="34" charset="0"/>
+                <a:cs typeface="Calibri" pitchFamily="34" charset="0"/>
+              </a:rPr>
+              <a:t>2 Nights</a:t>
+            </a:r>
+          </a:p>
+          <a:p>
+            <a:pPr marL="0" indent="0" algn="l">
+              <a:lnSpc>
+                <a:spcPct val="100000"/>
+              </a:lnSpc>
+              <a:spcBef>
+                <a:spcPts val="200"/>
+              </a:spcBef>
+              <a:buNone/>
+            </a:pPr>
+            <a:r>
+              <a:rPr lang="en-US" sz="850" kern="0" dirty="0">
+                <a:solidFill>
+                  <a:srgbClr val="A7A296"/>
+                </a:solidFill>
+                <a:latin typeface="Calibri" pitchFamily="34" charset="0"/>
+                <a:cs typeface="Calibri" pitchFamily="34" charset="0"/>
+              </a:rPr>
+              <a:t>minimum stay</a:t>
+            </a:r>
+          </a:p>
+        </p:txBody>
+      </p:sp>
+      <p:sp>
+        <p:nvSpPr>
+          <p:cNvPr id="16" name="card"/>
+          <p:cNvSpPr/>
+          <p:nvPr/>
+        </p:nvSpPr>
+        <p:spPr>
+          <a:xfrm>
+            <a:off x="4418320" y="2150000"/>
+            <a:ext cx="3355360" cy="950000"/>
+          </a:xfrm>
+          <a:prstGeom prst="roundRect">
+            <a:avLst>
+              <a:gd name="adj" fmla="val 6000"/>
+            </a:avLst>
+          </a:prstGeom>
+          <a:solidFill>
+            <a:srgbClr val="1C1F24"/>
+          </a:solidFill>
+          <a:ln w="12700">
+            <a:solidFill>
+              <a:srgbClr val="534AB7"/>
+            </a:solidFill>
+            <a:prstDash val="solid"/>
+          </a:ln>
+        </p:spPr>
+        <p:txBody>
+          <a:bodyPr wrap="square" lIns="137160" tIns="68580" rIns="137160" bIns="68580" rtlCol="0" anchor="ctr"/>
+          <a:lstStyle/>
+          <a:p>
+            <a:pPr marL="0" indent="0" algn="l">
+              <a:lnSpc>
+                <a:spcPct val="100000"/>
+              </a:lnSpc>
+              <a:buNone/>
+            </a:pPr>
+            <a:r>
+              <a:rPr lang="en-US" sz="1000" b="1" spc="200" kern="0" dirty="0">
+                <a:solidFill>
+                  <a:srgbClr val="534AB7"/>
+                </a:solidFill>
+                <a:latin typeface="Calibri" pitchFamily="34" charset="0"/>
+                <a:cs typeface="Calibri" pitchFamily="34" charset="0"/>
+              </a:rPr>
+              <a:t>ROOM</a:t>
+            </a:r>
+          </a:p>
+          <a:p>
+            <a:pPr marL="0" indent="0" algn="l">
+              <a:lnSpc>
+                <a:spcPct val="100000"/>
+              </a:lnSpc>
+              <a:spcBef>
+                <a:spcPts val="200"/>
+              </a:spcBef>
+              <a:buNone/>
+            </a:pPr>
+            <a:r>
+              <a:rPr lang="en-US" sz="1400" b="1" kern="0" dirty="0">
+                <a:solidFill>
+                  <a:srgbClr val="F2EEE6"/>
+                </a:solidFill>
+                <a:latin typeface="Calibri" pitchFamily="34" charset="0"/>
+                <a:cs typeface="Calibri" pitchFamily="34" charset="0"/>
+              </a:rPr>
+              <a:t>Equarius / Michael</a:t>
+            </a:r>
+          </a:p>
+          <a:p>
+            <a:pPr marL="0" indent="0" algn="l">
+              <a:lnSpc>
+                <a:spcPct val="100000"/>
+              </a:lnSpc>
+              <a:spcBef>
+                <a:spcPts val="200"/>
+              </a:spcBef>
+              <a:buNone/>
+            </a:pPr>
+            <a:r>
+              <a:rPr lang="en-US" sz="850" kern="0" dirty="0">
+                <a:solidFill>
+                  <a:srgbClr val="A7A296"/>
+                </a:solidFill>
+                <a:latin typeface="Calibri" pitchFamily="34" charset="0"/>
+                <a:cs typeface="Calibri" pitchFamily="34" charset="0"/>
+              </a:rPr>
+              <a:t>Deluxe Room</a:t>
+            </a:r>
+          </a:p>
+        </p:txBody>
+      </p:sp>
+      <p:sp>
+        <p:nvSpPr>
+          <p:cNvPr id="17" name="card"/>
+          <p:cNvSpPr/>
+          <p:nvPr/>
+        </p:nvSpPr>
+        <p:spPr>
+          <a:xfrm>
+            <a:off x="8013680" y="2150000"/>
+            <a:ext cx="3355360" cy="950000"/>
+          </a:xfrm>
+          <a:prstGeom prst="roundRect">
+            <a:avLst>
+              <a:gd name="adj" fmla="val 6000"/>
+            </a:avLst>
+          </a:prstGeom>
+          <a:solidFill>
+            <a:srgbClr val="23201A"/>
+          </a:solidFill>
+          <a:ln w="15875">
+            <a:solidFill>
+              <a:srgbClr val="C8A24A"/>
+            </a:solidFill>
+            <a:prstDash val="solid"/>
+          </a:ln>
+        </p:spPr>
+        <p:txBody>
+          <a:bodyPr wrap="square" lIns="137160" tIns="68580" rIns="137160" bIns="68580" rtlCol="0" anchor="ctr"/>
+          <a:lstStyle/>
+          <a:p>
+            <a:pPr marL="0" indent="0" algn="l">
+              <a:lnSpc>
+                <a:spcPct val="100000"/>
+              </a:lnSpc>
+              <a:buNone/>
+            </a:pPr>
+            <a:r>
+              <a:rPr lang="en-US" sz="1000" b="1" spc="200" kern="0" dirty="0">
+                <a:solidFill>
+                  <a:srgbClr val="E6CE8F"/>
+                </a:solidFill>
+                <a:latin typeface="Calibri" pitchFamily="34" charset="0"/>
+                <a:cs typeface="Calibri" pitchFamily="34" charset="0"/>
+              </a:rPr>
+              <a:t>FROM</a:t>
+            </a:r>
+          </a:p>
+          <a:p>
+            <a:pPr marL="0" indent="0" algn="l">
+              <a:lnSpc>
+                <a:spcPct val="100000"/>
+              </a:lnSpc>
+              <a:spcBef>
+                <a:spcPts val="200"/>
+              </a:spcBef>
+              <a:buNone/>
+            </a:pPr>
+            <a:r>
+              <a:rPr lang="en-US" sz="2400" b="1" kern="0" dirty="0">
+                <a:solidFill>
+                  <a:srgbClr val="F2EEE6"/>
+                </a:solidFill>
+                <a:latin typeface="Georgia" pitchFamily="34" charset="0"/>
+                <a:cs typeface="Georgia" pitchFamily="34" charset="0"/>
+              </a:rPr>
+              <a:t>999</a:t>
+            </a:r>
+          </a:p>
+          <a:p>
+            <a:pPr marL="0" indent="0" algn="l">
+              <a:lnSpc>
+                <a:spcPct val="100000"/>
+              </a:lnSpc>
+              <a:spcBef>
+                <a:spcPts val="200"/>
+              </a:spcBef>
+              <a:buNone/>
+            </a:pPr>
+            <a:r>
+              <a:rPr lang="en-US" sz="850" kern="0" dirty="0">
+                <a:solidFill>
+                  <a:srgbClr val="A7A296"/>
+                </a:solidFill>
+                <a:latin typeface="Calibri" pitchFamily="34" charset="0"/>
+                <a:cs typeface="Calibri" pitchFamily="34" charset="0"/>
+              </a:rPr>
+              <a:t>AsiaGO! Pass Credits, from</a:t>
+            </a:r>
+          </a:p>
+        </p:txBody>
+      </p:sp>
+      <p:sp>
+        <p:nvSpPr>
+          <p:cNvPr id="18" name="r"/>
+          <p:cNvSpPr/>
+          <p:nvPr/>
+        </p:nvSpPr>
+        <p:spPr>
+          <a:xfrm>
+            <a:off x="822960" y="3370000"/>
+            <a:ext cx="360000" cy="45720"/>
+          </a:xfrm>
+          <a:prstGeom prst="rect">
+            <a:avLst/>
+          </a:prstGeom>
+          <a:solidFill>
+            <a:srgbClr val="534AB7"/>
+          </a:solidFill>
+        </p:spPr>
+        <p:txBody>
+          <a:bodyPr/>
+          <a:lstStyle/>
+          <a:p>
+            <a:endParaRPr lang="en-US"/>
+          </a:p>
+        </p:txBody>
+      </p:sp>
+      <p:sp>
+        <p:nvSpPr>
+          <p:cNvPr id="19" name="tb"/>
+          <p:cNvSpPr/>
+          <p:nvPr/>
+        </p:nvSpPr>
+        <p:spPr>
+          <a:xfrm>
+            <a:off x="1262960" y="3340000"/>
+            <a:ext cx="5740000" cy="250000"/>
+          </a:xfrm>
+          <a:prstGeom prst="rect">
+            <a:avLst/>
+          </a:prstGeom>
+          <a:noFill/>
+        </p:spPr>
+        <p:txBody>
+          <a:bodyPr wrap="square" lIns="0" tIns="0" rIns="0" bIns="0" rtlCol="0" anchor="t"/>
+          <a:lstStyle/>
+          <a:p>
+            <a:pPr marL="0" indent="0" algn="l">
+              <a:buNone/>
+            </a:pPr>
+            <a:r>
+              <a:rPr lang="en-US" sz="1100" b="1" spc="280" kern="0" dirty="0">
+                <a:solidFill>
+                  <a:srgbClr val="C8A24A"/>
+                </a:solidFill>
+                <a:latin typeface="Calibri" pitchFamily="34" charset="0"/>
+                <a:cs typeface="Calibri" pitchFamily="34" charset="0"/>
+              </a:rPr>
+              <a:t>WHAT'S INCLUDED</a:t>
+            </a:r>
+          </a:p>
+        </p:txBody>
+      </p:sp>
+      <p:sp>
+        <p:nvSpPr>
+          <p:cNvPr id="20" name="r"/>
+          <p:cNvSpPr/>
+          <p:nvPr/>
+        </p:nvSpPr>
+        <p:spPr>
+          <a:xfrm>
+            <a:off x="7362960" y="3370000"/>
+            <a:ext cx="360000" cy="45720"/>
+          </a:xfrm>
+          <a:prstGeom prst="rect">
+            <a:avLst/>
+          </a:prstGeom>
+          <a:solidFill>
+            <a:srgbClr val="534AB7"/>
+          </a:solidFill>
+        </p:spPr>
+        <p:txBody>
+          <a:bodyPr/>
+          <a:lstStyle/>
+          <a:p>
+            <a:endParaRPr lang="en-US"/>
+          </a:p>
+        </p:txBody>
+      </p:sp>
+      <p:sp>
+        <p:nvSpPr>
+          <p:cNvPr id="21" name="tb"/>
+          <p:cNvSpPr/>
+          <p:nvPr/>
+        </p:nvSpPr>
+        <p:spPr>
+          <a:xfrm>
+            <a:off x="7802960" y="3340000"/>
+            <a:ext cx="3566080" cy="250000"/>
+          </a:xfrm>
+          <a:prstGeom prst="rect">
+            <a:avLst/>
+          </a:prstGeom>
+          <a:noFill/>
+        </p:spPr>
+        <p:txBody>
+          <a:bodyPr wrap="square" lIns="0" tIns="0" rIns="0" bIns="0" rtlCol="0" anchor="t"/>
+          <a:lstStyle/>
+          <a:p>
+            <a:pPr marL="0" indent="0" algn="l">
+              <a:buNone/>
+            </a:pPr>
+            <a:r>
+              <a:rPr lang="en-US" sz="1100" b="1" spc="240" kern="0" dirty="0">
+                <a:solidFill>
+                  <a:srgbClr val="C8A24A"/>
+                </a:solidFill>
+                <a:latin typeface="Calibri" pitchFamily="34" charset="0"/>
+                <a:cs typeface="Calibri" pitchFamily="34" charset="0"/>
+              </a:rPr>
+              <a:t>WHY GUESTS LOVE IT</a:t>
+            </a:r>
+          </a:p>
+        </p:txBody>
+      </p:sp>
+      <p:sp>
+        <p:nvSpPr>
+          <p:cNvPr id="22" name="tb"/>
+          <p:cNvSpPr/>
+          <p:nvPr/>
+        </p:nvSpPr>
+        <p:spPr>
+          <a:xfrm>
+            <a:off x="822960" y="3670000"/>
+            <a:ext cx="6180000" cy="3000000"/>
+          </a:xfrm>
+          <a:prstGeom prst="rect">
+            <a:avLst/>
+          </a:prstGeom>
+          <a:noFill/>
+        </p:spPr>
+        <p:txBody>
+          <a:bodyPr wrap="square" lIns="0" tIns="0" rIns="0" bIns="0" rtlCol="0" anchor="t"/>
+          <a:lstStyle/>
+          <a:p>
+            <a:pPr marL="200000" indent="-200000" algn="l">
+              <a:lnSpc>
+                <a:spcPct val="100000"/>
+              </a:lnSpc>
+              <a:spcBef>
+                <a:spcPts val="400"/>
+              </a:spcBef>
+              <a:buClr>
+                <a:srgbClr val="534AB7"/>
+              </a:buClr>
+              <a:buFont typeface="Arial"/>
+              <a:buChar char="▸"/>
+            </a:pPr>
+            <a:r>
+              <a:rPr lang="en-US" sz="1050" kern="0" dirty="0">
+                <a:solidFill>
+                  <a:srgbClr val="F2EEE6"/>
+                </a:solidFill>
+                <a:latin typeface="Calibri" pitchFamily="34" charset="0"/>
+                <a:cs typeface="Calibri" pitchFamily="34" charset="0"/>
+              </a:rPr>
+              <a:t>2 nights at Equarius Hotel or Hotel Michael (Deluxe)</a:t>
+            </a:r>
+          </a:p>
+          <a:p>
+            <a:pPr marL="200000" indent="-200000" algn="l">
+              <a:lnSpc>
+                <a:spcPct val="100000"/>
+              </a:lnSpc>
+              <a:spcBef>
+                <a:spcPts val="400"/>
+              </a:spcBef>
+              <a:buClr>
+                <a:srgbClr val="534AB7"/>
+              </a:buClr>
+              <a:buFont typeface="Arial"/>
+              <a:buChar char="▸"/>
+            </a:pPr>
+            <a:r>
+              <a:rPr lang="en-US" sz="1050" kern="0" dirty="0">
+                <a:solidFill>
+                  <a:srgbClr val="F2EEE6"/>
+                </a:solidFill>
+                <a:latin typeface="Calibri" pitchFamily="34" charset="0"/>
+                <a:cs typeface="Calibri" pitchFamily="34" charset="0"/>
+              </a:rPr>
+              <a:t>2× Universal Studios Singapore 1-day tickets</a:t>
+            </a:r>
+          </a:p>
+          <a:p>
+            <a:pPr marL="200000" indent="-200000" algn="l">
+              <a:lnSpc>
+                <a:spcPct val="100000"/>
+              </a:lnSpc>
+              <a:spcBef>
+                <a:spcPts val="400"/>
+              </a:spcBef>
+              <a:buClr>
+                <a:srgbClr val="534AB7"/>
+              </a:buClr>
+              <a:buFont typeface="Arial"/>
+              <a:buChar char="▸"/>
+            </a:pPr>
+            <a:r>
+              <a:rPr lang="en-US" sz="1050" kern="0" dirty="0">
+                <a:solidFill>
+                  <a:srgbClr val="F2EEE6"/>
+                </a:solidFill>
+                <a:latin typeface="Calibri" pitchFamily="34" charset="0"/>
+                <a:cs typeface="Calibri" pitchFamily="34" charset="0"/>
+              </a:rPr>
+              <a:t>2× S.E.A. Oceanarium 1-day tickets</a:t>
+            </a:r>
+          </a:p>
+          <a:p>
+            <a:pPr marL="200000" indent="-200000" algn="l">
+              <a:lnSpc>
+                <a:spcPct val="100000"/>
+              </a:lnSpc>
+              <a:spcBef>
+                <a:spcPts val="400"/>
+              </a:spcBef>
+              <a:buClr>
+                <a:srgbClr val="534AB7"/>
+              </a:buClr>
+              <a:buFont typeface="Arial"/>
+              <a:buChar char="▸"/>
+            </a:pPr>
+            <a:r>
+              <a:rPr lang="en-US" sz="1050" kern="0" dirty="0">
+                <a:solidFill>
+                  <a:srgbClr val="F2EEE6"/>
+                </a:solidFill>
+                <a:latin typeface="Calibri" pitchFamily="34" charset="0"/>
+                <a:cs typeface="Calibri" pitchFamily="34" charset="0"/>
+              </a:rPr>
+              <a:t>2× daily breakfast</a:t>
+            </a:r>
+          </a:p>
+          <a:p>
+            <a:pPr marL="200000" indent="-200000" algn="l">
+              <a:lnSpc>
+                <a:spcPct val="100000"/>
+              </a:lnSpc>
+              <a:spcBef>
+                <a:spcPts val="400"/>
+              </a:spcBef>
+              <a:buClr>
+                <a:srgbClr val="534AB7"/>
+              </a:buClr>
+              <a:buFont typeface="Arial"/>
+              <a:buChar char="▸"/>
+            </a:pPr>
+            <a:r>
+              <a:rPr lang="en-US" sz="1050" kern="0" dirty="0">
+                <a:solidFill>
+                  <a:srgbClr val="F2EEE6"/>
+                </a:solidFill>
+                <a:latin typeface="Calibri" pitchFamily="34" charset="0"/>
+                <a:cs typeface="Calibri" pitchFamily="34" charset="0"/>
+              </a:rPr>
+              <a:t>Early check-in &amp; late check-out (subject to availability)</a:t>
+            </a:r>
+          </a:p>
+        </p:txBody>
+      </p:sp>
+      <p:sp>
+        <p:nvSpPr>
+          <p:cNvPr id="23" name="tb"/>
+          <p:cNvSpPr/>
+          <p:nvPr/>
+        </p:nvSpPr>
+        <p:spPr>
+          <a:xfrm>
+            <a:off x="7362960" y="3670000"/>
+            <a:ext cx="4006080" cy="3000000"/>
+          </a:xfrm>
+          <a:prstGeom prst="rect">
+            <a:avLst/>
+          </a:prstGeom>
+          <a:noFill/>
+        </p:spPr>
+        <p:txBody>
+          <a:bodyPr wrap="square" lIns="0" tIns="0" rIns="0" bIns="0" rtlCol="0" anchor="t"/>
+          <a:lstStyle/>
+          <a:p>
+            <a:pPr marL="0" indent="0" algn="l">
+              <a:lnSpc>
+                <a:spcPct val="100000"/>
+              </a:lnSpc>
+              <a:buNone/>
+            </a:pPr>
+            <a:r>
+              <a:rPr lang="en-US" sz="1100" b="1" kern="0" dirty="0">
+                <a:solidFill>
+                  <a:srgbClr val="F2EEE6"/>
+                </a:solidFill>
+                <a:latin typeface="Calibri" pitchFamily="34" charset="0"/>
+                <a:cs typeface="Calibri" pitchFamily="34" charset="0"/>
+              </a:rPr>
+              <a:t>Stay where the fun is</a:t>
+            </a:r>
+          </a:p>
+          <a:p>
+            <a:pPr marL="0" indent="0" algn="l">
+              <a:lnSpc>
+                <a:spcPct val="100000"/>
+              </a:lnSpc>
+              <a:spcBef>
+                <a:spcPts val="120"/>
+              </a:spcBef>
+              <a:buNone/>
+            </a:pPr>
+            <a:r>
+              <a:rPr lang="en-US" sz="950" kern="0" dirty="0">
+                <a:solidFill>
+                  <a:srgbClr val="A7A296"/>
+                </a:solidFill>
+                <a:latin typeface="Calibri" pitchFamily="34" charset="0"/>
+                <a:cs typeface="Calibri" pitchFamily="34" charset="0"/>
+              </a:rPr>
+              <a:t>Inside Resorts World Sentosa, steps from the parks</a:t>
+            </a:r>
+          </a:p>
+          <a:p>
+            <a:pPr marL="0" indent="0" algn="l">
+              <a:lnSpc>
+                <a:spcPct val="100000"/>
+              </a:lnSpc>
+              <a:spcBef>
+                <a:spcPts val="600"/>
+              </a:spcBef>
+              <a:buNone/>
+            </a:pPr>
+            <a:r>
+              <a:rPr lang="en-US" sz="1100" b="1" kern="0" dirty="0">
+                <a:solidFill>
+                  <a:srgbClr val="F2EEE6"/>
+                </a:solidFill>
+                <a:latin typeface="Calibri" pitchFamily="34" charset="0"/>
+                <a:cs typeface="Calibri" pitchFamily="34" charset="0"/>
+              </a:rPr>
+              <a:t>Two attractions included</a:t>
+            </a:r>
+          </a:p>
+          <a:p>
+            <a:pPr marL="0" indent="0" algn="l">
+              <a:lnSpc>
+                <a:spcPct val="100000"/>
+              </a:lnSpc>
+              <a:spcBef>
+                <a:spcPts val="120"/>
+              </a:spcBef>
+              <a:buNone/>
+            </a:pPr>
+            <a:r>
+              <a:rPr lang="en-US" sz="950" kern="0" dirty="0">
+                <a:solidFill>
+                  <a:srgbClr val="A7A296"/>
+                </a:solidFill>
+                <a:latin typeface="Calibri" pitchFamily="34" charset="0"/>
+                <a:cs typeface="Calibri" pitchFamily="34" charset="0"/>
+              </a:rPr>
+              <a:t>Universal Studios + S.E.A. Oceanarium for two</a:t>
+            </a:r>
+          </a:p>
+          <a:p>
+            <a:pPr marL="0" indent="0" algn="l">
+              <a:lnSpc>
+                <a:spcPct val="100000"/>
+              </a:lnSpc>
+              <a:spcBef>
+                <a:spcPts val="600"/>
+              </a:spcBef>
+              <a:buNone/>
+            </a:pPr>
+            <a:r>
+              <a:rPr lang="en-US" sz="1100" b="1" kern="0" dirty="0">
+                <a:solidFill>
+                  <a:srgbClr val="F2EEE6"/>
+                </a:solidFill>
+                <a:latin typeface="Calibri" pitchFamily="34" charset="0"/>
+                <a:cs typeface="Calibri" pitchFamily="34" charset="0"/>
+              </a:rPr>
+              <a:t>Choice of hotels</a:t>
+            </a:r>
+          </a:p>
+          <a:p>
+            <a:pPr marL="0" indent="0" algn="l">
+              <a:lnSpc>
+                <a:spcPct val="100000"/>
+              </a:lnSpc>
+              <a:spcBef>
+                <a:spcPts val="120"/>
+              </a:spcBef>
+              <a:buNone/>
+            </a:pPr>
+            <a:r>
+              <a:rPr lang="en-US" sz="950" kern="0" dirty="0">
+                <a:solidFill>
+                  <a:srgbClr val="A7A296"/>
+                </a:solidFill>
+                <a:latin typeface="Calibri" pitchFamily="34" charset="0"/>
+                <a:cs typeface="Calibri" pitchFamily="34" charset="0"/>
+              </a:rPr>
+              <a:t>Pick Equarius Hotel or Hotel Michael</a:t>
+            </a:r>
+          </a:p>
+          <a:p>
+            <a:pPr marL="0" indent="0" algn="l">
+              <a:lnSpc>
+                <a:spcPct val="100000"/>
+              </a:lnSpc>
+              <a:spcBef>
+                <a:spcPts val="600"/>
+              </a:spcBef>
+              <a:buNone/>
+            </a:pPr>
+            <a:r>
+              <a:rPr lang="en-US" sz="1100" b="1" kern="0" dirty="0">
+                <a:solidFill>
+                  <a:srgbClr val="F2EEE6"/>
+                </a:solidFill>
+                <a:latin typeface="Calibri" pitchFamily="34" charset="0"/>
+                <a:cs typeface="Calibri" pitchFamily="34" charset="0"/>
+              </a:rPr>
+              <a:t>Effortless days</a:t>
+            </a:r>
+          </a:p>
+          <a:p>
+            <a:pPr marL="0" indent="0" algn="l">
+              <a:lnSpc>
+                <a:spcPct val="100000"/>
+              </a:lnSpc>
+              <a:spcBef>
+                <a:spcPts val="120"/>
+              </a:spcBef>
+              <a:buNone/>
+            </a:pPr>
+            <a:r>
+              <a:rPr lang="en-US" sz="950" kern="0" dirty="0">
+                <a:solidFill>
+                  <a:srgbClr val="A7A296"/>
+                </a:solidFill>
+                <a:latin typeface="Calibri" pitchFamily="34" charset="0"/>
+                <a:cs typeface="Calibri" pitchFamily="34" charset="0"/>
+              </a:rPr>
+              <a:t>Early check-in &amp; late check-out to maximise play</a:t>
+            </a:r>
+          </a:p>
+        </p:txBody>
+      </p:sp>
+      <p:sp>
+        <p:nvSpPr>
+          <p:cNvPr id="24" name="tb"/>
+          <p:cNvSpPr/>
+          <p:nvPr/>
+        </p:nvSpPr>
+        <p:spPr>
+          <a:xfrm>
+            <a:off x="822960" y="6520000"/>
+            <a:ext cx="5400000" cy="240000"/>
+          </a:xfrm>
+          <a:prstGeom prst="rect">
+            <a:avLst/>
+          </a:prstGeom>
+          <a:noFill/>
+        </p:spPr>
+        <p:txBody>
+          <a:bodyPr wrap="square" lIns="0" tIns="0" rIns="0" bIns="0" rtlCol="0" anchor="t"/>
+          <a:lstStyle/>
+          <a:p>
+            <a:pPr marL="0" indent="0" algn="l">
+              <a:buNone/>
+            </a:pPr>
+            <a:r>
+              <a:rPr lang="en-US" sz="900" i="1" kern="0" dirty="0">
+                <a:solidFill>
+                  <a:srgbClr val="A7A296"/>
+                </a:solidFill>
+                <a:latin typeface="Calibri" pitchFamily="34" charset="0"/>
+                <a:cs typeface="Calibri" pitchFamily="34" charset="0"/>
+              </a:rPr>
+              <a:t>Pay with AsiaGO! Pass Credits  ·  AsiaGO Hotel Collection</a:t>
+            </a:r>
+          </a:p>
+        </p:txBody>
+      </p:sp>
+      <p:sp>
+        <p:nvSpPr>
+          <p:cNvPr id="25" name="tb"/>
+          <p:cNvSpPr/>
+          <p:nvPr/>
+        </p:nvSpPr>
+        <p:spPr>
+          <a:xfrm>
+            <a:off x="8369040" y="6520000"/>
+            <a:ext cx="3000000" cy="240000"/>
+          </a:xfrm>
+          <a:prstGeom prst="rect">
+            <a:avLst/>
+          </a:prstGeom>
+          <a:noFill/>
+        </p:spPr>
+        <p:txBody>
+          <a:bodyPr wrap="square" lIns="0" tIns="0" rIns="0" bIns="0" rtlCol="0" anchor="t"/>
+          <a:lstStyle/>
+          <a:p>
+            <a:pPr marL="0" indent="0" algn="r">
+              <a:buNone/>
+            </a:pPr>
+            <a:r>
+              <a:rPr lang="en-US" sz="950" b="1" spc="100" kern="0" dirty="0">
+                <a:solidFill>
+                  <a:srgbClr val="C8A24A"/>
+                </a:solidFill>
+                <a:latin typeface="Calibri" pitchFamily="34" charset="0"/>
+                <a:cs typeface="Calibri" pitchFamily="34" charset="0"/>
+              </a:rPr>
+              <a:t>AsiaGO! Pass</a:t>
+            </a:r>
+          </a:p>
+        </p:txBody>
+      </p:sp>
+    </p:spTree>
+  </p:cSld>
+  <p:clrMapOvr>
+    <a:masterClrMapping/>
+  </p:clrMapOvr>
+</p:sld>
+</file>
+
 <file path=ppt/slides/slide3.xml><?xml version="1.0" encoding="utf-8"?>
 <p:sld xmlns:a="http://schemas.openxmlformats.org/drawingml/2006/main" xmlns:r="http://schemas.openxmlformats.org/officeDocument/2006/relationships" xmlns:p="http://schemas.openxmlformats.org/presentationml/2006/main">
   <p:cSld name="Slide 3">
@@ -21350,6 +24360,2090 @@
               <a:t>15</a:t>
             </a:r>
             <a:endParaRPr lang="en-US" sz="1000" dirty="0"/>
+          </a:p>
+        </p:txBody>
+      </p:sp>
+    </p:spTree>
+  </p:cSld>
+  <p:clrMapOvr>
+    <a:masterClrMapping/>
+  </p:clrMapOvr>
+</p:sld>
+</file>
+
+<file path=ppt/slides/slide30.xml><?xml version="1.0" encoding="utf-8"?>
+<p:sld xmlns:a="http://schemas.openxmlformats.org/drawingml/2006/main" xmlns:r="http://schemas.openxmlformats.org/officeDocument/2006/relationships" xmlns:p="http://schemas.openxmlformats.org/presentationml/2006/main">
+  <p:cSld>
+    <p:bg>
+      <p:bgPr>
+        <a:solidFill>
+          <a:srgbClr val="121316"/>
+        </a:solidFill>
+        <a:effectLst/>
+      </p:bgPr>
+    </p:bg>
+    <p:spTree>
+      <p:nvGrpSpPr>
+        <p:cNvPr id="1" name=""/>
+        <p:cNvGrpSpPr/>
+        <p:nvPr/>
+      </p:nvGrpSpPr>
+      <p:grpSpPr>
+        <a:xfrm>
+          <a:off x="0" y="0"/>
+          <a:ext cx="0" cy="0"/>
+          <a:chOff x="0" y="0"/>
+          <a:chExt cx="0" cy="0"/>
+        </a:xfrm>
+      </p:grpSpPr>
+      <p:sp>
+        <p:nvSpPr>
+          <p:cNvPr id="11" name="r"/>
+          <p:cNvSpPr/>
+          <p:nvPr/>
+        </p:nvSpPr>
+        <p:spPr>
+          <a:xfrm>
+            <a:off x="0" y="0"/>
+            <a:ext cx="12192000" cy="1990000"/>
+          </a:xfrm>
+          <a:prstGeom prst="rect">
+            <a:avLst/>
+          </a:prstGeom>
+          <a:gradFill>
+            <a:gsLst>
+              <a:gs pos="0">
+                <a:srgbClr val="08405A"/>
+              </a:gs>
+              <a:gs pos="55000">
+                <a:srgbClr val="1685A6"/>
+              </a:gs>
+              <a:gs pos="100000">
+                <a:srgbClr val="37B0C4"/>
+              </a:gs>
+            </a:gsLst>
+            <a:lin ang="2700000" scaled="1"/>
+          </a:gradFill>
+        </p:spPr>
+        <p:txBody>
+          <a:bodyPr/>
+          <a:lstStyle/>
+          <a:p>
+            <a:endParaRPr lang="en-US"/>
+          </a:p>
+        </p:txBody>
+      </p:sp>
+      <p:sp>
+        <p:nvSpPr>
+          <p:cNvPr id="12" name="tb"/>
+          <p:cNvSpPr/>
+          <p:nvPr/>
+        </p:nvSpPr>
+        <p:spPr>
+          <a:xfrm>
+            <a:off x="822960" y="300000"/>
+            <a:ext cx="9000000" cy="260000"/>
+          </a:xfrm>
+          <a:prstGeom prst="rect">
+            <a:avLst/>
+          </a:prstGeom>
+          <a:noFill/>
+        </p:spPr>
+        <p:txBody>
+          <a:bodyPr wrap="square" lIns="0" tIns="0" rIns="0" bIns="0" rtlCol="0" anchor="t"/>
+          <a:lstStyle/>
+          <a:p>
+            <a:pPr marL="0" indent="0" algn="l">
+              <a:buNone/>
+            </a:pPr>
+            <a:r>
+              <a:rPr lang="en-US" sz="1050" b="1" spc="300" kern="0" dirty="0">
+                <a:solidFill>
+                  <a:srgbClr val="FFFFFF"/>
+                </a:solidFill>
+                <a:latin typeface="Calibri" pitchFamily="34" charset="0"/>
+                <a:cs typeface="Calibri" pitchFamily="34" charset="0"/>
+              </a:rPr>
+              <a:t>AsiaGO PASS  ·  HOTEL COLLECTION</a:t>
+            </a:r>
+          </a:p>
+        </p:txBody>
+      </p:sp>
+      <p:sp>
+        <p:nvSpPr>
+          <p:cNvPr id="13" name="tb"/>
+          <p:cNvSpPr/>
+          <p:nvPr/>
+        </p:nvSpPr>
+        <p:spPr>
+          <a:xfrm>
+            <a:off x="822960" y="610000"/>
+            <a:ext cx="10000000" cy="840000"/>
+          </a:xfrm>
+          <a:prstGeom prst="rect">
+            <a:avLst/>
+          </a:prstGeom>
+          <a:noFill/>
+        </p:spPr>
+        <p:txBody>
+          <a:bodyPr wrap="square" lIns="0" tIns="0" rIns="0" bIns="0" rtlCol="0" anchor="t"/>
+          <a:lstStyle/>
+          <a:p>
+            <a:pPr marL="0" indent="0" algn="l">
+              <a:lnSpc>
+                <a:spcPct val="100000"/>
+              </a:lnSpc>
+              <a:buNone/>
+            </a:pPr>
+            <a:r>
+              <a:rPr lang="en-US" sz="3000" b="1" kern="0" dirty="0">
+                <a:solidFill>
+                  <a:srgbClr val="FFFFFF"/>
+                </a:solidFill>
+                <a:latin typeface="Georgia" pitchFamily="34" charset="0"/>
+                <a:cs typeface="Georgia" pitchFamily="34" charset="0"/>
+              </a:rPr>
+              <a:t>Kalima Resort &amp; Spa</a:t>
+            </a:r>
+          </a:p>
+        </p:txBody>
+      </p:sp>
+      <p:sp>
+        <p:nvSpPr>
+          <p:cNvPr id="14" name="tb"/>
+          <p:cNvSpPr/>
+          <p:nvPr/>
+        </p:nvSpPr>
+        <p:spPr>
+          <a:xfrm>
+            <a:off x="822960" y="1480000"/>
+            <a:ext cx="9600000" cy="440000"/>
+          </a:xfrm>
+          <a:prstGeom prst="rect">
+            <a:avLst/>
+          </a:prstGeom>
+          <a:noFill/>
+        </p:spPr>
+        <p:txBody>
+          <a:bodyPr wrap="square" lIns="0" tIns="0" rIns="0" bIns="0" rtlCol="0" anchor="t"/>
+          <a:lstStyle/>
+          <a:p>
+            <a:pPr marL="0" indent="0" algn="l">
+              <a:lnSpc>
+                <a:spcPct val="104000"/>
+              </a:lnSpc>
+              <a:buNone/>
+            </a:pPr>
+            <a:r>
+              <a:rPr lang="en-US" sz="1250" kern="0" dirty="0">
+                <a:solidFill>
+                  <a:srgbClr val="FFFFFF"/>
+                </a:solidFill>
+                <a:latin typeface="Calibri" pitchFamily="34" charset="0"/>
+                <a:cs typeface="Calibri" pitchFamily="34" charset="0"/>
+              </a:rPr>
+              <a:t>Deluxe Seaview — a five-night beachfront escape with sky-bar dining and airport transfers.</a:t>
+            </a:r>
+          </a:p>
+        </p:txBody>
+      </p:sp>
+      <p:sp>
+        <p:nvSpPr>
+          <p:cNvPr id="15" name="card"/>
+          <p:cNvSpPr/>
+          <p:nvPr/>
+        </p:nvSpPr>
+        <p:spPr>
+          <a:xfrm>
+            <a:off x="822960" y="2150000"/>
+            <a:ext cx="3355360" cy="950000"/>
+          </a:xfrm>
+          <a:prstGeom prst="roundRect">
+            <a:avLst>
+              <a:gd name="adj" fmla="val 6000"/>
+            </a:avLst>
+          </a:prstGeom>
+          <a:solidFill>
+            <a:srgbClr val="1C1F24"/>
+          </a:solidFill>
+          <a:ln w="12700">
+            <a:solidFill>
+              <a:srgbClr val="1685A6"/>
+            </a:solidFill>
+            <a:prstDash val="solid"/>
+          </a:ln>
+        </p:spPr>
+        <p:txBody>
+          <a:bodyPr wrap="square" lIns="137160" tIns="68580" rIns="137160" bIns="68580" rtlCol="0" anchor="ctr"/>
+          <a:lstStyle/>
+          <a:p>
+            <a:pPr marL="0" indent="0" algn="l">
+              <a:lnSpc>
+                <a:spcPct val="100000"/>
+              </a:lnSpc>
+              <a:buNone/>
+            </a:pPr>
+            <a:r>
+              <a:rPr lang="en-US" sz="1000" b="1" spc="200" kern="0" dirty="0">
+                <a:solidFill>
+                  <a:srgbClr val="1685A6"/>
+                </a:solidFill>
+                <a:latin typeface="Calibri" pitchFamily="34" charset="0"/>
+                <a:cs typeface="Calibri" pitchFamily="34" charset="0"/>
+              </a:rPr>
+              <a:t>STAY</a:t>
+            </a:r>
+          </a:p>
+          <a:p>
+            <a:pPr marL="0" indent="0" algn="l">
+              <a:lnSpc>
+                <a:spcPct val="100000"/>
+              </a:lnSpc>
+              <a:spcBef>
+                <a:spcPts val="200"/>
+              </a:spcBef>
+              <a:buNone/>
+            </a:pPr>
+            <a:r>
+              <a:rPr lang="en-US" sz="1600" b="1" kern="0" dirty="0">
+                <a:solidFill>
+                  <a:srgbClr val="F2EEE6"/>
+                </a:solidFill>
+                <a:latin typeface="Calibri" pitchFamily="34" charset="0"/>
+                <a:cs typeface="Calibri" pitchFamily="34" charset="0"/>
+              </a:rPr>
+              <a:t>5 Nights</a:t>
+            </a:r>
+          </a:p>
+          <a:p>
+            <a:pPr marL="0" indent="0" algn="l">
+              <a:lnSpc>
+                <a:spcPct val="100000"/>
+              </a:lnSpc>
+              <a:spcBef>
+                <a:spcPts val="200"/>
+              </a:spcBef>
+              <a:buNone/>
+            </a:pPr>
+            <a:r>
+              <a:rPr lang="en-US" sz="850" kern="0" dirty="0">
+                <a:solidFill>
+                  <a:srgbClr val="A7A296"/>
+                </a:solidFill>
+                <a:latin typeface="Calibri" pitchFamily="34" charset="0"/>
+                <a:cs typeface="Calibri" pitchFamily="34" charset="0"/>
+              </a:rPr>
+              <a:t>minimum stay</a:t>
+            </a:r>
+          </a:p>
+        </p:txBody>
+      </p:sp>
+      <p:sp>
+        <p:nvSpPr>
+          <p:cNvPr id="16" name="card"/>
+          <p:cNvSpPr/>
+          <p:nvPr/>
+        </p:nvSpPr>
+        <p:spPr>
+          <a:xfrm>
+            <a:off x="4418320" y="2150000"/>
+            <a:ext cx="3355360" cy="950000"/>
+          </a:xfrm>
+          <a:prstGeom prst="roundRect">
+            <a:avLst>
+              <a:gd name="adj" fmla="val 6000"/>
+            </a:avLst>
+          </a:prstGeom>
+          <a:solidFill>
+            <a:srgbClr val="1C1F24"/>
+          </a:solidFill>
+          <a:ln w="12700">
+            <a:solidFill>
+              <a:srgbClr val="1685A6"/>
+            </a:solidFill>
+            <a:prstDash val="solid"/>
+          </a:ln>
+        </p:spPr>
+        <p:txBody>
+          <a:bodyPr wrap="square" lIns="137160" tIns="68580" rIns="137160" bIns="68580" rtlCol="0" anchor="ctr"/>
+          <a:lstStyle/>
+          <a:p>
+            <a:pPr marL="0" indent="0" algn="l">
+              <a:lnSpc>
+                <a:spcPct val="100000"/>
+              </a:lnSpc>
+              <a:buNone/>
+            </a:pPr>
+            <a:r>
+              <a:rPr lang="en-US" sz="1000" b="1" spc="200" kern="0" dirty="0">
+                <a:solidFill>
+                  <a:srgbClr val="1685A6"/>
+                </a:solidFill>
+                <a:latin typeface="Calibri" pitchFamily="34" charset="0"/>
+                <a:cs typeface="Calibri" pitchFamily="34" charset="0"/>
+              </a:rPr>
+              <a:t>ROOM</a:t>
+            </a:r>
+          </a:p>
+          <a:p>
+            <a:pPr marL="0" indent="0" algn="l">
+              <a:lnSpc>
+                <a:spcPct val="100000"/>
+              </a:lnSpc>
+              <a:spcBef>
+                <a:spcPts val="200"/>
+              </a:spcBef>
+              <a:buNone/>
+            </a:pPr>
+            <a:r>
+              <a:rPr lang="en-US" sz="1500" b="1" kern="0" dirty="0">
+                <a:solidFill>
+                  <a:srgbClr val="F2EEE6"/>
+                </a:solidFill>
+                <a:latin typeface="Calibri" pitchFamily="34" charset="0"/>
+                <a:cs typeface="Calibri" pitchFamily="34" charset="0"/>
+              </a:rPr>
+              <a:t>Deluxe Seaview</a:t>
+            </a:r>
+          </a:p>
+          <a:p>
+            <a:pPr marL="0" indent="0" algn="l">
+              <a:lnSpc>
+                <a:spcPct val="100000"/>
+              </a:lnSpc>
+              <a:spcBef>
+                <a:spcPts val="200"/>
+              </a:spcBef>
+              <a:buNone/>
+            </a:pPr>
+            <a:r>
+              <a:rPr lang="en-US" sz="850" kern="0" dirty="0">
+                <a:solidFill>
+                  <a:srgbClr val="A7A296"/>
+                </a:solidFill>
+                <a:latin typeface="Calibri" pitchFamily="34" charset="0"/>
+                <a:cs typeface="Calibri" pitchFamily="34" charset="0"/>
+              </a:rPr>
+              <a:t>for 2 guests</a:t>
+            </a:r>
+          </a:p>
+        </p:txBody>
+      </p:sp>
+      <p:sp>
+        <p:nvSpPr>
+          <p:cNvPr id="17" name="card"/>
+          <p:cNvSpPr/>
+          <p:nvPr/>
+        </p:nvSpPr>
+        <p:spPr>
+          <a:xfrm>
+            <a:off x="8013680" y="2150000"/>
+            <a:ext cx="3355360" cy="950000"/>
+          </a:xfrm>
+          <a:prstGeom prst="roundRect">
+            <a:avLst>
+              <a:gd name="adj" fmla="val 6000"/>
+            </a:avLst>
+          </a:prstGeom>
+          <a:solidFill>
+            <a:srgbClr val="23201A"/>
+          </a:solidFill>
+          <a:ln w="15875">
+            <a:solidFill>
+              <a:srgbClr val="C8A24A"/>
+            </a:solidFill>
+            <a:prstDash val="solid"/>
+          </a:ln>
+        </p:spPr>
+        <p:txBody>
+          <a:bodyPr wrap="square" lIns="137160" tIns="68580" rIns="137160" bIns="68580" rtlCol="0" anchor="ctr"/>
+          <a:lstStyle/>
+          <a:p>
+            <a:pPr marL="0" indent="0" algn="l">
+              <a:lnSpc>
+                <a:spcPct val="100000"/>
+              </a:lnSpc>
+              <a:buNone/>
+            </a:pPr>
+            <a:r>
+              <a:rPr lang="en-US" sz="1000" b="1" spc="200" kern="0" dirty="0">
+                <a:solidFill>
+                  <a:srgbClr val="E6CE8F"/>
+                </a:solidFill>
+                <a:latin typeface="Calibri" pitchFamily="34" charset="0"/>
+                <a:cs typeface="Calibri" pitchFamily="34" charset="0"/>
+              </a:rPr>
+              <a:t>FROM</a:t>
+            </a:r>
+          </a:p>
+          <a:p>
+            <a:pPr marL="0" indent="0" algn="l">
+              <a:lnSpc>
+                <a:spcPct val="100000"/>
+              </a:lnSpc>
+              <a:spcBef>
+                <a:spcPts val="200"/>
+              </a:spcBef>
+              <a:buNone/>
+            </a:pPr>
+            <a:r>
+              <a:rPr lang="en-US" sz="2400" b="1" kern="0" dirty="0">
+                <a:solidFill>
+                  <a:srgbClr val="F2EEE6"/>
+                </a:solidFill>
+                <a:latin typeface="Georgia" pitchFamily="34" charset="0"/>
+                <a:cs typeface="Georgia" pitchFamily="34" charset="0"/>
+              </a:rPr>
+              <a:t>789</a:t>
+            </a:r>
+          </a:p>
+          <a:p>
+            <a:pPr marL="0" indent="0" algn="l">
+              <a:lnSpc>
+                <a:spcPct val="100000"/>
+              </a:lnSpc>
+              <a:spcBef>
+                <a:spcPts val="200"/>
+              </a:spcBef>
+              <a:buNone/>
+            </a:pPr>
+            <a:r>
+              <a:rPr lang="en-US" sz="850" kern="0" dirty="0">
+                <a:solidFill>
+                  <a:srgbClr val="A7A296"/>
+                </a:solidFill>
+                <a:latin typeface="Calibri" pitchFamily="34" charset="0"/>
+                <a:cs typeface="Calibri" pitchFamily="34" charset="0"/>
+              </a:rPr>
+              <a:t>AsiaGO! Pass Credits, total</a:t>
+            </a:r>
+          </a:p>
+        </p:txBody>
+      </p:sp>
+      <p:sp>
+        <p:nvSpPr>
+          <p:cNvPr id="18" name="r"/>
+          <p:cNvSpPr/>
+          <p:nvPr/>
+        </p:nvSpPr>
+        <p:spPr>
+          <a:xfrm>
+            <a:off x="822960" y="3370000"/>
+            <a:ext cx="360000" cy="45720"/>
+          </a:xfrm>
+          <a:prstGeom prst="rect">
+            <a:avLst/>
+          </a:prstGeom>
+          <a:solidFill>
+            <a:srgbClr val="1685A6"/>
+          </a:solidFill>
+        </p:spPr>
+        <p:txBody>
+          <a:bodyPr/>
+          <a:lstStyle/>
+          <a:p>
+            <a:endParaRPr lang="en-US"/>
+          </a:p>
+        </p:txBody>
+      </p:sp>
+      <p:sp>
+        <p:nvSpPr>
+          <p:cNvPr id="19" name="tb"/>
+          <p:cNvSpPr/>
+          <p:nvPr/>
+        </p:nvSpPr>
+        <p:spPr>
+          <a:xfrm>
+            <a:off x="1262960" y="3340000"/>
+            <a:ext cx="5740000" cy="250000"/>
+          </a:xfrm>
+          <a:prstGeom prst="rect">
+            <a:avLst/>
+          </a:prstGeom>
+          <a:noFill/>
+        </p:spPr>
+        <p:txBody>
+          <a:bodyPr wrap="square" lIns="0" tIns="0" rIns="0" bIns="0" rtlCol="0" anchor="t"/>
+          <a:lstStyle/>
+          <a:p>
+            <a:pPr marL="0" indent="0" algn="l">
+              <a:buNone/>
+            </a:pPr>
+            <a:r>
+              <a:rPr lang="en-US" sz="1100" b="1" spc="280" kern="0" dirty="0">
+                <a:solidFill>
+                  <a:srgbClr val="C8A24A"/>
+                </a:solidFill>
+                <a:latin typeface="Calibri" pitchFamily="34" charset="0"/>
+                <a:cs typeface="Calibri" pitchFamily="34" charset="0"/>
+              </a:rPr>
+              <a:t>WHAT'S INCLUDED</a:t>
+            </a:r>
+          </a:p>
+        </p:txBody>
+      </p:sp>
+      <p:sp>
+        <p:nvSpPr>
+          <p:cNvPr id="20" name="r"/>
+          <p:cNvSpPr/>
+          <p:nvPr/>
+        </p:nvSpPr>
+        <p:spPr>
+          <a:xfrm>
+            <a:off x="7362960" y="3370000"/>
+            <a:ext cx="360000" cy="45720"/>
+          </a:xfrm>
+          <a:prstGeom prst="rect">
+            <a:avLst/>
+          </a:prstGeom>
+          <a:solidFill>
+            <a:srgbClr val="1685A6"/>
+          </a:solidFill>
+        </p:spPr>
+        <p:txBody>
+          <a:bodyPr/>
+          <a:lstStyle/>
+          <a:p>
+            <a:endParaRPr lang="en-US"/>
+          </a:p>
+        </p:txBody>
+      </p:sp>
+      <p:sp>
+        <p:nvSpPr>
+          <p:cNvPr id="21" name="tb"/>
+          <p:cNvSpPr/>
+          <p:nvPr/>
+        </p:nvSpPr>
+        <p:spPr>
+          <a:xfrm>
+            <a:off x="7802960" y="3340000"/>
+            <a:ext cx="3566080" cy="250000"/>
+          </a:xfrm>
+          <a:prstGeom prst="rect">
+            <a:avLst/>
+          </a:prstGeom>
+          <a:noFill/>
+        </p:spPr>
+        <p:txBody>
+          <a:bodyPr wrap="square" lIns="0" tIns="0" rIns="0" bIns="0" rtlCol="0" anchor="t"/>
+          <a:lstStyle/>
+          <a:p>
+            <a:pPr marL="0" indent="0" algn="l">
+              <a:buNone/>
+            </a:pPr>
+            <a:r>
+              <a:rPr lang="en-US" sz="1100" b="1" spc="240" kern="0" dirty="0">
+                <a:solidFill>
+                  <a:srgbClr val="C8A24A"/>
+                </a:solidFill>
+                <a:latin typeface="Calibri" pitchFamily="34" charset="0"/>
+                <a:cs typeface="Calibri" pitchFamily="34" charset="0"/>
+              </a:rPr>
+              <a:t>WHY GUESTS LOVE IT</a:t>
+            </a:r>
+          </a:p>
+        </p:txBody>
+      </p:sp>
+      <p:sp>
+        <p:nvSpPr>
+          <p:cNvPr id="22" name="tb"/>
+          <p:cNvSpPr/>
+          <p:nvPr/>
+        </p:nvSpPr>
+        <p:spPr>
+          <a:xfrm>
+            <a:off x="822960" y="3670000"/>
+            <a:ext cx="6180000" cy="3000000"/>
+          </a:xfrm>
+          <a:prstGeom prst="rect">
+            <a:avLst/>
+          </a:prstGeom>
+          <a:noFill/>
+        </p:spPr>
+        <p:txBody>
+          <a:bodyPr wrap="square" lIns="0" tIns="0" rIns="0" bIns="0" rtlCol="0" anchor="t"/>
+          <a:lstStyle/>
+          <a:p>
+            <a:pPr marL="200000" indent="-200000" algn="l">
+              <a:lnSpc>
+                <a:spcPct val="100000"/>
+              </a:lnSpc>
+              <a:spcBef>
+                <a:spcPts val="400"/>
+              </a:spcBef>
+              <a:buClr>
+                <a:srgbClr val="1685A6"/>
+              </a:buClr>
+              <a:buFont typeface="Arial"/>
+              <a:buChar char="▸"/>
+            </a:pPr>
+            <a:r>
+              <a:rPr lang="en-US" sz="1050" kern="0" dirty="0">
+                <a:solidFill>
+                  <a:srgbClr val="F2EEE6"/>
+                </a:solidFill>
+                <a:latin typeface="Calibri" pitchFamily="34" charset="0"/>
+                <a:cs typeface="Calibri" pitchFamily="34" charset="0"/>
+              </a:rPr>
+              <a:t>Daily breakfast for 2</a:t>
+            </a:r>
+          </a:p>
+          <a:p>
+            <a:pPr marL="200000" indent="-200000" algn="l">
+              <a:lnSpc>
+                <a:spcPct val="100000"/>
+              </a:lnSpc>
+              <a:spcBef>
+                <a:spcPts val="400"/>
+              </a:spcBef>
+              <a:buClr>
+                <a:srgbClr val="1685A6"/>
+              </a:buClr>
+              <a:buFont typeface="Arial"/>
+              <a:buChar char="▸"/>
+            </a:pPr>
+            <a:r>
+              <a:rPr lang="en-US" sz="1050" kern="0" dirty="0">
+                <a:solidFill>
+                  <a:srgbClr val="F2EEE6"/>
+                </a:solidFill>
+                <a:latin typeface="Calibri" pitchFamily="34" charset="0"/>
+                <a:cs typeface="Calibri" pitchFamily="34" charset="0"/>
+              </a:rPr>
+              <a:t>Round-trip airport transfer for 2</a:t>
+            </a:r>
+          </a:p>
+          <a:p>
+            <a:pPr marL="200000" indent="-200000" algn="l">
+              <a:lnSpc>
+                <a:spcPct val="100000"/>
+              </a:lnSpc>
+              <a:spcBef>
+                <a:spcPts val="400"/>
+              </a:spcBef>
+              <a:buClr>
+                <a:srgbClr val="1685A6"/>
+              </a:buClr>
+              <a:buFont typeface="Arial"/>
+              <a:buChar char="▸"/>
+            </a:pPr>
+            <a:r>
+              <a:rPr lang="en-US" sz="1050" kern="0" dirty="0">
+                <a:solidFill>
+                  <a:srgbClr val="F2EEE6"/>
+                </a:solidFill>
+                <a:latin typeface="Calibri" pitchFamily="34" charset="0"/>
+                <a:cs typeface="Calibri" pitchFamily="34" charset="0"/>
+              </a:rPr>
+              <a:t>Welcome local snack &amp; welcome drink</a:t>
+            </a:r>
+          </a:p>
+          <a:p>
+            <a:pPr marL="200000" indent="-200000" algn="l">
+              <a:lnSpc>
+                <a:spcPct val="100000"/>
+              </a:lnSpc>
+              <a:spcBef>
+                <a:spcPts val="400"/>
+              </a:spcBef>
+              <a:buClr>
+                <a:srgbClr val="1685A6"/>
+              </a:buClr>
+              <a:buFont typeface="Arial"/>
+              <a:buChar char="▸"/>
+            </a:pPr>
+            <a:r>
+              <a:rPr lang="en-US" sz="1050" kern="0" dirty="0">
+                <a:solidFill>
+                  <a:srgbClr val="F2EEE6"/>
+                </a:solidFill>
+                <a:latin typeface="Calibri" pitchFamily="34" charset="0"/>
+                <a:cs typeface="Calibri" pitchFamily="34" charset="0"/>
+              </a:rPr>
+              <a:t>Cocktails at Malika Sky Bar for 2</a:t>
+            </a:r>
+          </a:p>
+          <a:p>
+            <a:pPr marL="200000" indent="-200000" algn="l">
+              <a:lnSpc>
+                <a:spcPct val="100000"/>
+              </a:lnSpc>
+              <a:spcBef>
+                <a:spcPts val="400"/>
+              </a:spcBef>
+              <a:buClr>
+                <a:srgbClr val="1685A6"/>
+              </a:buClr>
+              <a:buFont typeface="Arial"/>
+              <a:buChar char="▸"/>
+            </a:pPr>
+            <a:r>
+              <a:rPr lang="en-US" sz="1050" kern="0" dirty="0">
+                <a:solidFill>
+                  <a:srgbClr val="F2EEE6"/>
+                </a:solidFill>
+                <a:latin typeface="Calibri" pitchFamily="34" charset="0"/>
+                <a:cs typeface="Calibri" pitchFamily="34" charset="0"/>
+              </a:rPr>
+              <a:t>BBQ Seafood Tower terrace set for 2 at Malika Sky Bar</a:t>
+            </a:r>
+          </a:p>
+          <a:p>
+            <a:pPr marL="200000" indent="-200000" algn="l">
+              <a:lnSpc>
+                <a:spcPct val="100000"/>
+              </a:lnSpc>
+              <a:spcBef>
+                <a:spcPts val="400"/>
+              </a:spcBef>
+              <a:buClr>
+                <a:srgbClr val="1685A6"/>
+              </a:buClr>
+              <a:buFont typeface="Arial"/>
+              <a:buChar char="▸"/>
+            </a:pPr>
+            <a:r>
+              <a:rPr lang="en-US" sz="1050" kern="0" dirty="0">
+                <a:solidFill>
+                  <a:srgbClr val="F2EEE6"/>
+                </a:solidFill>
+                <a:latin typeface="Calibri" pitchFamily="34" charset="0"/>
+                <a:cs typeface="Calibri" pitchFamily="34" charset="0"/>
+              </a:rPr>
+              <a:t>Teppanyaki &amp; sushi tasting dinner for 2 at Gin</a:t>
+            </a:r>
+          </a:p>
+          <a:p>
+            <a:pPr marL="200000" indent="-200000" algn="l">
+              <a:lnSpc>
+                <a:spcPct val="100000"/>
+              </a:lnSpc>
+              <a:spcBef>
+                <a:spcPts val="400"/>
+              </a:spcBef>
+              <a:buClr>
+                <a:srgbClr val="1685A6"/>
+              </a:buClr>
+              <a:buFont typeface="Arial"/>
+              <a:buChar char="▸"/>
+            </a:pPr>
+            <a:r>
+              <a:rPr lang="en-US" sz="1050" kern="0" dirty="0">
+                <a:solidFill>
+                  <a:srgbClr val="F2EEE6"/>
+                </a:solidFill>
+                <a:latin typeface="Calibri" pitchFamily="34" charset="0"/>
+                <a:cs typeface="Calibri" pitchFamily="34" charset="0"/>
+              </a:rPr>
+              <a:t>Early check-in / late check-out &amp; in-room minibar</a:t>
+            </a:r>
+          </a:p>
+        </p:txBody>
+      </p:sp>
+      <p:sp>
+        <p:nvSpPr>
+          <p:cNvPr id="23" name="tb"/>
+          <p:cNvSpPr/>
+          <p:nvPr/>
+        </p:nvSpPr>
+        <p:spPr>
+          <a:xfrm>
+            <a:off x="7362960" y="3670000"/>
+            <a:ext cx="4006080" cy="3000000"/>
+          </a:xfrm>
+          <a:prstGeom prst="rect">
+            <a:avLst/>
+          </a:prstGeom>
+          <a:noFill/>
+        </p:spPr>
+        <p:txBody>
+          <a:bodyPr wrap="square" lIns="0" tIns="0" rIns="0" bIns="0" rtlCol="0" anchor="t"/>
+          <a:lstStyle/>
+          <a:p>
+            <a:pPr marL="0" indent="0" algn="l">
+              <a:lnSpc>
+                <a:spcPct val="100000"/>
+              </a:lnSpc>
+              <a:buNone/>
+            </a:pPr>
+            <a:r>
+              <a:rPr lang="en-US" sz="1100" b="1" kern="0" dirty="0">
+                <a:solidFill>
+                  <a:srgbClr val="F2EEE6"/>
+                </a:solidFill>
+                <a:latin typeface="Calibri" pitchFamily="34" charset="0"/>
+                <a:cs typeface="Calibri" pitchFamily="34" charset="0"/>
+              </a:rPr>
+              <a:t>Five-night escape</a:t>
+            </a:r>
+          </a:p>
+          <a:p>
+            <a:pPr marL="0" indent="0" algn="l">
+              <a:lnSpc>
+                <a:spcPct val="100000"/>
+              </a:lnSpc>
+              <a:spcBef>
+                <a:spcPts val="120"/>
+              </a:spcBef>
+              <a:buNone/>
+            </a:pPr>
+            <a:r>
+              <a:rPr lang="en-US" sz="950" kern="0" dirty="0">
+                <a:solidFill>
+                  <a:srgbClr val="A7A296"/>
+                </a:solidFill>
+                <a:latin typeface="Calibri" pitchFamily="34" charset="0"/>
+                <a:cs typeface="Calibri" pitchFamily="34" charset="0"/>
+              </a:rPr>
+              <a:t>A proper unwind by the sea — not just a quick stay</a:t>
+            </a:r>
+          </a:p>
+          <a:p>
+            <a:pPr marL="0" indent="0" algn="l">
+              <a:lnSpc>
+                <a:spcPct val="100000"/>
+              </a:lnSpc>
+              <a:spcBef>
+                <a:spcPts val="600"/>
+              </a:spcBef>
+              <a:buNone/>
+            </a:pPr>
+            <a:r>
+              <a:rPr lang="en-US" sz="1100" b="1" kern="0" dirty="0">
+                <a:solidFill>
+                  <a:srgbClr val="F2EEE6"/>
+                </a:solidFill>
+                <a:latin typeface="Calibri" pitchFamily="34" charset="0"/>
+                <a:cs typeface="Calibri" pitchFamily="34" charset="0"/>
+              </a:rPr>
+              <a:t>Sky-bar dining</a:t>
+            </a:r>
+          </a:p>
+          <a:p>
+            <a:pPr marL="0" indent="0" algn="l">
+              <a:lnSpc>
+                <a:spcPct val="100000"/>
+              </a:lnSpc>
+              <a:spcBef>
+                <a:spcPts val="120"/>
+              </a:spcBef>
+              <a:buNone/>
+            </a:pPr>
+            <a:r>
+              <a:rPr lang="en-US" sz="950" kern="0" dirty="0">
+                <a:solidFill>
+                  <a:srgbClr val="A7A296"/>
+                </a:solidFill>
+                <a:latin typeface="Calibri" pitchFamily="34" charset="0"/>
+                <a:cs typeface="Calibri" pitchFamily="34" charset="0"/>
+              </a:rPr>
+              <a:t>Cocktails &amp; seafood tower with elevated views</a:t>
+            </a:r>
+          </a:p>
+          <a:p>
+            <a:pPr marL="0" indent="0" algn="l">
+              <a:lnSpc>
+                <a:spcPct val="100000"/>
+              </a:lnSpc>
+              <a:spcBef>
+                <a:spcPts val="600"/>
+              </a:spcBef>
+              <a:buNone/>
+            </a:pPr>
+            <a:r>
+              <a:rPr lang="en-US" sz="1100" b="1" kern="0" dirty="0">
+                <a:solidFill>
+                  <a:srgbClr val="F2EEE6"/>
+                </a:solidFill>
+                <a:latin typeface="Calibri" pitchFamily="34" charset="0"/>
+                <a:cs typeface="Calibri" pitchFamily="34" charset="0"/>
+              </a:rPr>
+              <a:t>Transfers included</a:t>
+            </a:r>
+          </a:p>
+          <a:p>
+            <a:pPr marL="0" indent="0" algn="l">
+              <a:lnSpc>
+                <a:spcPct val="100000"/>
+              </a:lnSpc>
+              <a:spcBef>
+                <a:spcPts val="120"/>
+              </a:spcBef>
+              <a:buNone/>
+            </a:pPr>
+            <a:r>
+              <a:rPr lang="en-US" sz="950" kern="0" dirty="0">
+                <a:solidFill>
+                  <a:srgbClr val="A7A296"/>
+                </a:solidFill>
+                <a:latin typeface="Calibri" pitchFamily="34" charset="0"/>
+                <a:cs typeface="Calibri" pitchFamily="34" charset="0"/>
+              </a:rPr>
+              <a:t>Round-trip airport transfers handled for you</a:t>
+            </a:r>
+          </a:p>
+          <a:p>
+            <a:pPr marL="0" indent="0" algn="l">
+              <a:lnSpc>
+                <a:spcPct val="100000"/>
+              </a:lnSpc>
+              <a:spcBef>
+                <a:spcPts val="600"/>
+              </a:spcBef>
+              <a:buNone/>
+            </a:pPr>
+            <a:r>
+              <a:rPr lang="en-US" sz="1100" b="1" kern="0" dirty="0">
+                <a:solidFill>
+                  <a:srgbClr val="F2EEE6"/>
+                </a:solidFill>
+                <a:latin typeface="Calibri" pitchFamily="34" charset="0"/>
+                <a:cs typeface="Calibri" pitchFamily="34" charset="0"/>
+              </a:rPr>
+              <a:t>Gourmet inclusions</a:t>
+            </a:r>
+          </a:p>
+          <a:p>
+            <a:pPr marL="0" indent="0" algn="l">
+              <a:lnSpc>
+                <a:spcPct val="100000"/>
+              </a:lnSpc>
+              <a:spcBef>
+                <a:spcPts val="120"/>
+              </a:spcBef>
+              <a:buNone/>
+            </a:pPr>
+            <a:r>
+              <a:rPr lang="en-US" sz="950" kern="0" dirty="0">
+                <a:solidFill>
+                  <a:srgbClr val="A7A296"/>
+                </a:solidFill>
+                <a:latin typeface="Calibri" pitchFamily="34" charset="0"/>
+                <a:cs typeface="Calibri" pitchFamily="34" charset="0"/>
+              </a:rPr>
+              <a:t>Teppanyaki, sushi &amp; welcome treats throughout</a:t>
+            </a:r>
+          </a:p>
+        </p:txBody>
+      </p:sp>
+      <p:sp>
+        <p:nvSpPr>
+          <p:cNvPr id="24" name="tb"/>
+          <p:cNvSpPr/>
+          <p:nvPr/>
+        </p:nvSpPr>
+        <p:spPr>
+          <a:xfrm>
+            <a:off x="822960" y="6520000"/>
+            <a:ext cx="5400000" cy="240000"/>
+          </a:xfrm>
+          <a:prstGeom prst="rect">
+            <a:avLst/>
+          </a:prstGeom>
+          <a:noFill/>
+        </p:spPr>
+        <p:txBody>
+          <a:bodyPr wrap="square" lIns="0" tIns="0" rIns="0" bIns="0" rtlCol="0" anchor="t"/>
+          <a:lstStyle/>
+          <a:p>
+            <a:pPr marL="0" indent="0" algn="l">
+              <a:buNone/>
+            </a:pPr>
+            <a:r>
+              <a:rPr lang="en-US" sz="900" i="1" kern="0" dirty="0">
+                <a:solidFill>
+                  <a:srgbClr val="A7A296"/>
+                </a:solidFill>
+                <a:latin typeface="Calibri" pitchFamily="34" charset="0"/>
+                <a:cs typeface="Calibri" pitchFamily="34" charset="0"/>
+              </a:rPr>
+              <a:t>Pay with AsiaGO! Pass Credits  ·  AsiaGO Hotel Collection</a:t>
+            </a:r>
+          </a:p>
+        </p:txBody>
+      </p:sp>
+      <p:sp>
+        <p:nvSpPr>
+          <p:cNvPr id="25" name="tb"/>
+          <p:cNvSpPr/>
+          <p:nvPr/>
+        </p:nvSpPr>
+        <p:spPr>
+          <a:xfrm>
+            <a:off x="8369040" y="6520000"/>
+            <a:ext cx="3000000" cy="240000"/>
+          </a:xfrm>
+          <a:prstGeom prst="rect">
+            <a:avLst/>
+          </a:prstGeom>
+          <a:noFill/>
+        </p:spPr>
+        <p:txBody>
+          <a:bodyPr wrap="square" lIns="0" tIns="0" rIns="0" bIns="0" rtlCol="0" anchor="t"/>
+          <a:lstStyle/>
+          <a:p>
+            <a:pPr marL="0" indent="0" algn="r">
+              <a:buNone/>
+            </a:pPr>
+            <a:r>
+              <a:rPr lang="en-US" sz="950" b="1" spc="100" kern="0" dirty="0">
+                <a:solidFill>
+                  <a:srgbClr val="C8A24A"/>
+                </a:solidFill>
+                <a:latin typeface="Calibri" pitchFamily="34" charset="0"/>
+                <a:cs typeface="Calibri" pitchFamily="34" charset="0"/>
+              </a:rPr>
+              <a:t>AsiaGO! Pass</a:t>
+            </a:r>
+          </a:p>
+        </p:txBody>
+      </p:sp>
+    </p:spTree>
+  </p:cSld>
+  <p:clrMapOvr>
+    <a:masterClrMapping/>
+  </p:clrMapOvr>
+</p:sld>
+</file>
+
+<file path=ppt/slides/slide31.xml><?xml version="1.0" encoding="utf-8"?>
+<p:sld xmlns:a="http://schemas.openxmlformats.org/drawingml/2006/main" xmlns:r="http://schemas.openxmlformats.org/officeDocument/2006/relationships" xmlns:p="http://schemas.openxmlformats.org/presentationml/2006/main">
+  <p:cSld>
+    <p:bg>
+      <p:bgPr>
+        <a:solidFill>
+          <a:srgbClr val="121316"/>
+        </a:solidFill>
+        <a:effectLst/>
+      </p:bgPr>
+    </p:bg>
+    <p:spTree>
+      <p:nvGrpSpPr>
+        <p:cNvPr id="1" name=""/>
+        <p:cNvGrpSpPr/>
+        <p:nvPr/>
+      </p:nvGrpSpPr>
+      <p:grpSpPr>
+        <a:xfrm>
+          <a:off x="0" y="0"/>
+          <a:ext cx="0" cy="0"/>
+          <a:chOff x="0" y="0"/>
+          <a:chExt cx="0" cy="0"/>
+        </a:xfrm>
+      </p:grpSpPr>
+      <p:sp>
+        <p:nvSpPr>
+          <p:cNvPr id="11" name="r"/>
+          <p:cNvSpPr/>
+          <p:nvPr/>
+        </p:nvSpPr>
+        <p:spPr>
+          <a:xfrm>
+            <a:off x="0" y="0"/>
+            <a:ext cx="12192000" cy="1990000"/>
+          </a:xfrm>
+          <a:prstGeom prst="rect">
+            <a:avLst/>
+          </a:prstGeom>
+          <a:gradFill>
+            <a:gsLst>
+              <a:gs pos="0">
+                <a:srgbClr val="0A4F4A"/>
+              </a:gs>
+              <a:gs pos="55000">
+                <a:srgbClr val="12907F"/>
+              </a:gs>
+              <a:gs pos="100000">
+                <a:srgbClr val="1D9E75"/>
+              </a:gs>
+            </a:gsLst>
+            <a:lin ang="2700000" scaled="1"/>
+          </a:gradFill>
+        </p:spPr>
+        <p:txBody>
+          <a:bodyPr/>
+          <a:lstStyle/>
+          <a:p>
+            <a:endParaRPr lang="en-US"/>
+          </a:p>
+        </p:txBody>
+      </p:sp>
+      <p:sp>
+        <p:nvSpPr>
+          <p:cNvPr id="12" name="tb"/>
+          <p:cNvSpPr/>
+          <p:nvPr/>
+        </p:nvSpPr>
+        <p:spPr>
+          <a:xfrm>
+            <a:off x="822960" y="300000"/>
+            <a:ext cx="9000000" cy="260000"/>
+          </a:xfrm>
+          <a:prstGeom prst="rect">
+            <a:avLst/>
+          </a:prstGeom>
+          <a:noFill/>
+        </p:spPr>
+        <p:txBody>
+          <a:bodyPr wrap="square" lIns="0" tIns="0" rIns="0" bIns="0" rtlCol="0" anchor="t"/>
+          <a:lstStyle/>
+          <a:p>
+            <a:pPr marL="0" indent="0" algn="l">
+              <a:buNone/>
+            </a:pPr>
+            <a:r>
+              <a:rPr lang="en-US" sz="1050" b="1" spc="300" kern="0" dirty="0">
+                <a:solidFill>
+                  <a:srgbClr val="FFFFFF"/>
+                </a:solidFill>
+                <a:latin typeface="Calibri" pitchFamily="34" charset="0"/>
+                <a:cs typeface="Calibri" pitchFamily="34" charset="0"/>
+              </a:rPr>
+              <a:t>AsiaGO PASS  ·  HOTEL COLLECTION</a:t>
+            </a:r>
+          </a:p>
+        </p:txBody>
+      </p:sp>
+      <p:sp>
+        <p:nvSpPr>
+          <p:cNvPr id="13" name="tb"/>
+          <p:cNvSpPr/>
+          <p:nvPr/>
+        </p:nvSpPr>
+        <p:spPr>
+          <a:xfrm>
+            <a:off x="822960" y="610000"/>
+            <a:ext cx="10000000" cy="840000"/>
+          </a:xfrm>
+          <a:prstGeom prst="rect">
+            <a:avLst/>
+          </a:prstGeom>
+          <a:noFill/>
+        </p:spPr>
+        <p:txBody>
+          <a:bodyPr wrap="square" lIns="0" tIns="0" rIns="0" bIns="0" rtlCol="0" anchor="t"/>
+          <a:lstStyle/>
+          <a:p>
+            <a:pPr marL="0" indent="0" algn="l">
+              <a:lnSpc>
+                <a:spcPct val="100000"/>
+              </a:lnSpc>
+              <a:buNone/>
+            </a:pPr>
+            <a:r>
+              <a:rPr lang="en-US" sz="3000" b="1" kern="0" dirty="0">
+                <a:solidFill>
+                  <a:srgbClr val="FFFFFF"/>
+                </a:solidFill>
+                <a:latin typeface="Georgia" pitchFamily="34" charset="0"/>
+                <a:cs typeface="Georgia" pitchFamily="34" charset="0"/>
+              </a:rPr>
+              <a:t>Holiday Inn Resort Bintan</a:t>
+            </a:r>
+          </a:p>
+        </p:txBody>
+      </p:sp>
+      <p:sp>
+        <p:nvSpPr>
+          <p:cNvPr id="14" name="tb"/>
+          <p:cNvSpPr/>
+          <p:nvPr/>
+        </p:nvSpPr>
+        <p:spPr>
+          <a:xfrm>
+            <a:off x="822960" y="1480000"/>
+            <a:ext cx="9600000" cy="440000"/>
+          </a:xfrm>
+          <a:prstGeom prst="rect">
+            <a:avLst/>
+          </a:prstGeom>
+          <a:noFill/>
+        </p:spPr>
+        <p:txBody>
+          <a:bodyPr wrap="square" lIns="0" tIns="0" rIns="0" bIns="0" rtlCol="0" anchor="t"/>
+          <a:lstStyle/>
+          <a:p>
+            <a:pPr marL="0" indent="0" algn="l">
+              <a:lnSpc>
+                <a:spcPct val="104000"/>
+              </a:lnSpc>
+              <a:buNone/>
+            </a:pPr>
+            <a:r>
+              <a:rPr lang="en-US" sz="1250" kern="0" dirty="0">
+                <a:solidFill>
+                  <a:srgbClr val="FFFFFF"/>
+                </a:solidFill>
+                <a:latin typeface="Calibri" pitchFamily="34" charset="0"/>
+                <a:cs typeface="Calibri" pitchFamily="34" charset="0"/>
+              </a:rPr>
+              <a:t>A vibrant, family-friendly beachfront escape — just a short ferry from Singapore (2D1N).</a:t>
+            </a:r>
+          </a:p>
+        </p:txBody>
+      </p:sp>
+      <p:sp>
+        <p:nvSpPr>
+          <p:cNvPr id="15" name="card"/>
+          <p:cNvSpPr/>
+          <p:nvPr/>
+        </p:nvSpPr>
+        <p:spPr>
+          <a:xfrm>
+            <a:off x="822960" y="2150000"/>
+            <a:ext cx="3355360" cy="950000"/>
+          </a:xfrm>
+          <a:prstGeom prst="roundRect">
+            <a:avLst>
+              <a:gd name="adj" fmla="val 6000"/>
+            </a:avLst>
+          </a:prstGeom>
+          <a:solidFill>
+            <a:srgbClr val="1C1F24"/>
+          </a:solidFill>
+          <a:ln w="12700">
+            <a:solidFill>
+              <a:srgbClr val="0F6E56"/>
+            </a:solidFill>
+            <a:prstDash val="solid"/>
+          </a:ln>
+        </p:spPr>
+        <p:txBody>
+          <a:bodyPr wrap="square" lIns="137160" tIns="68580" rIns="137160" bIns="68580" rtlCol="0" anchor="ctr"/>
+          <a:lstStyle/>
+          <a:p>
+            <a:pPr marL="0" indent="0" algn="l">
+              <a:lnSpc>
+                <a:spcPct val="100000"/>
+              </a:lnSpc>
+              <a:buNone/>
+            </a:pPr>
+            <a:r>
+              <a:rPr lang="en-US" sz="1000" b="1" spc="200" kern="0" dirty="0">
+                <a:solidFill>
+                  <a:srgbClr val="0F6E56"/>
+                </a:solidFill>
+                <a:latin typeface="Calibri" pitchFamily="34" charset="0"/>
+                <a:cs typeface="Calibri" pitchFamily="34" charset="0"/>
+              </a:rPr>
+              <a:t>STAY</a:t>
+            </a:r>
+          </a:p>
+          <a:p>
+            <a:pPr marL="0" indent="0" algn="l">
+              <a:lnSpc>
+                <a:spcPct val="100000"/>
+              </a:lnSpc>
+              <a:spcBef>
+                <a:spcPts val="200"/>
+              </a:spcBef>
+              <a:buNone/>
+            </a:pPr>
+            <a:r>
+              <a:rPr lang="en-US" sz="1600" b="1" kern="0" dirty="0">
+                <a:solidFill>
+                  <a:srgbClr val="F2EEE6"/>
+                </a:solidFill>
+                <a:latin typeface="Calibri" pitchFamily="34" charset="0"/>
+                <a:cs typeface="Calibri" pitchFamily="34" charset="0"/>
+              </a:rPr>
+              <a:t>2D1N</a:t>
+            </a:r>
+          </a:p>
+          <a:p>
+            <a:pPr marL="0" indent="0" algn="l">
+              <a:lnSpc>
+                <a:spcPct val="100000"/>
+              </a:lnSpc>
+              <a:spcBef>
+                <a:spcPts val="200"/>
+              </a:spcBef>
+              <a:buNone/>
+            </a:pPr>
+            <a:r>
+              <a:rPr lang="en-US" sz="850" kern="0" dirty="0">
+                <a:solidFill>
+                  <a:srgbClr val="A7A296"/>
+                </a:solidFill>
+                <a:latin typeface="Calibri" pitchFamily="34" charset="0"/>
+                <a:cs typeface="Calibri" pitchFamily="34" charset="0"/>
+              </a:rPr>
+              <a:t>2 days · 1 night</a:t>
+            </a:r>
+          </a:p>
+        </p:txBody>
+      </p:sp>
+      <p:sp>
+        <p:nvSpPr>
+          <p:cNvPr id="16" name="card"/>
+          <p:cNvSpPr/>
+          <p:nvPr/>
+        </p:nvSpPr>
+        <p:spPr>
+          <a:xfrm>
+            <a:off x="4418320" y="2150000"/>
+            <a:ext cx="3355360" cy="950000"/>
+          </a:xfrm>
+          <a:prstGeom prst="roundRect">
+            <a:avLst>
+              <a:gd name="adj" fmla="val 6000"/>
+            </a:avLst>
+          </a:prstGeom>
+          <a:solidFill>
+            <a:srgbClr val="1C1F24"/>
+          </a:solidFill>
+          <a:ln w="12700">
+            <a:solidFill>
+              <a:srgbClr val="0F6E56"/>
+            </a:solidFill>
+            <a:prstDash val="solid"/>
+          </a:ln>
+        </p:spPr>
+        <p:txBody>
+          <a:bodyPr wrap="square" lIns="137160" tIns="68580" rIns="137160" bIns="68580" rtlCol="0" anchor="ctr"/>
+          <a:lstStyle/>
+          <a:p>
+            <a:pPr marL="0" indent="0" algn="l">
+              <a:lnSpc>
+                <a:spcPct val="100000"/>
+              </a:lnSpc>
+              <a:buNone/>
+            </a:pPr>
+            <a:r>
+              <a:rPr lang="en-US" sz="1000" b="1" spc="200" kern="0" dirty="0">
+                <a:solidFill>
+                  <a:srgbClr val="0F6E56"/>
+                </a:solidFill>
+                <a:latin typeface="Calibri" pitchFamily="34" charset="0"/>
+                <a:cs typeface="Calibri" pitchFamily="34" charset="0"/>
+              </a:rPr>
+              <a:t>ROOM</a:t>
+            </a:r>
+          </a:p>
+          <a:p>
+            <a:pPr marL="0" indent="0" algn="l">
+              <a:lnSpc>
+                <a:spcPct val="100000"/>
+              </a:lnSpc>
+              <a:spcBef>
+                <a:spcPts val="200"/>
+              </a:spcBef>
+              <a:buNone/>
+            </a:pPr>
+            <a:r>
+              <a:rPr lang="en-US" sz="1400" b="1" kern="0" dirty="0">
+                <a:solidFill>
+                  <a:srgbClr val="F2EEE6"/>
+                </a:solidFill>
+                <a:latin typeface="Calibri" pitchFamily="34" charset="0"/>
+                <a:cs typeface="Calibri" pitchFamily="34" charset="0"/>
+              </a:rPr>
+              <a:t>Pond View Room</a:t>
+            </a:r>
+          </a:p>
+          <a:p>
+            <a:pPr marL="0" indent="0" algn="l">
+              <a:lnSpc>
+                <a:spcPct val="100000"/>
+              </a:lnSpc>
+              <a:spcBef>
+                <a:spcPts val="200"/>
+              </a:spcBef>
+              <a:buNone/>
+            </a:pPr>
+            <a:r>
+              <a:rPr lang="en-US" sz="850" kern="0" dirty="0">
+                <a:solidFill>
+                  <a:srgbClr val="A7A296"/>
+                </a:solidFill>
+                <a:latin typeface="Calibri" pitchFamily="34" charset="0"/>
+                <a:cs typeface="Calibri" pitchFamily="34" charset="0"/>
+              </a:rPr>
+              <a:t>2 adults + 2 kids</a:t>
+            </a:r>
+          </a:p>
+        </p:txBody>
+      </p:sp>
+      <p:sp>
+        <p:nvSpPr>
+          <p:cNvPr id="17" name="card"/>
+          <p:cNvSpPr/>
+          <p:nvPr/>
+        </p:nvSpPr>
+        <p:spPr>
+          <a:xfrm>
+            <a:off x="8013680" y="2150000"/>
+            <a:ext cx="3355360" cy="950000"/>
+          </a:xfrm>
+          <a:prstGeom prst="roundRect">
+            <a:avLst>
+              <a:gd name="adj" fmla="val 6000"/>
+            </a:avLst>
+          </a:prstGeom>
+          <a:solidFill>
+            <a:srgbClr val="23201A"/>
+          </a:solidFill>
+          <a:ln w="15875">
+            <a:solidFill>
+              <a:srgbClr val="C8A24A"/>
+            </a:solidFill>
+            <a:prstDash val="solid"/>
+          </a:ln>
+        </p:spPr>
+        <p:txBody>
+          <a:bodyPr wrap="square" lIns="137160" tIns="68580" rIns="137160" bIns="68580" rtlCol="0" anchor="ctr"/>
+          <a:lstStyle/>
+          <a:p>
+            <a:pPr marL="0" indent="0" algn="l">
+              <a:lnSpc>
+                <a:spcPct val="100000"/>
+              </a:lnSpc>
+              <a:buNone/>
+            </a:pPr>
+            <a:r>
+              <a:rPr lang="en-US" sz="1000" b="1" spc="200" kern="0" dirty="0">
+                <a:solidFill>
+                  <a:srgbClr val="E6CE8F"/>
+                </a:solidFill>
+                <a:latin typeface="Calibri" pitchFamily="34" charset="0"/>
+                <a:cs typeface="Calibri" pitchFamily="34" charset="0"/>
+              </a:rPr>
+              <a:t>FROM</a:t>
+            </a:r>
+          </a:p>
+          <a:p>
+            <a:pPr marL="0" indent="0" algn="l">
+              <a:lnSpc>
+                <a:spcPct val="100000"/>
+              </a:lnSpc>
+              <a:spcBef>
+                <a:spcPts val="200"/>
+              </a:spcBef>
+              <a:buNone/>
+            </a:pPr>
+            <a:r>
+              <a:rPr lang="en-US" sz="2400" b="1" kern="0" dirty="0">
+                <a:solidFill>
+                  <a:srgbClr val="F2EEE6"/>
+                </a:solidFill>
+                <a:latin typeface="Georgia" pitchFamily="34" charset="0"/>
+                <a:cs typeface="Georgia" pitchFamily="34" charset="0"/>
+              </a:rPr>
+              <a:t>678</a:t>
+            </a:r>
+          </a:p>
+          <a:p>
+            <a:pPr marL="0" indent="0" algn="l">
+              <a:lnSpc>
+                <a:spcPct val="100000"/>
+              </a:lnSpc>
+              <a:spcBef>
+                <a:spcPts val="200"/>
+              </a:spcBef>
+              <a:buNone/>
+            </a:pPr>
+            <a:r>
+              <a:rPr lang="en-US" sz="850" kern="0" dirty="0">
+                <a:solidFill>
+                  <a:srgbClr val="A7A296"/>
+                </a:solidFill>
+                <a:latin typeface="Calibri" pitchFamily="34" charset="0"/>
+                <a:cs typeface="Calibri" pitchFamily="34" charset="0"/>
+              </a:rPr>
+              <a:t>AsiaGO! Pass Credits, total</a:t>
+            </a:r>
+          </a:p>
+        </p:txBody>
+      </p:sp>
+      <p:sp>
+        <p:nvSpPr>
+          <p:cNvPr id="18" name="r"/>
+          <p:cNvSpPr/>
+          <p:nvPr/>
+        </p:nvSpPr>
+        <p:spPr>
+          <a:xfrm>
+            <a:off x="822960" y="3370000"/>
+            <a:ext cx="360000" cy="45720"/>
+          </a:xfrm>
+          <a:prstGeom prst="rect">
+            <a:avLst/>
+          </a:prstGeom>
+          <a:solidFill>
+            <a:srgbClr val="0F6E56"/>
+          </a:solidFill>
+        </p:spPr>
+        <p:txBody>
+          <a:bodyPr/>
+          <a:lstStyle/>
+          <a:p>
+            <a:endParaRPr lang="en-US"/>
+          </a:p>
+        </p:txBody>
+      </p:sp>
+      <p:sp>
+        <p:nvSpPr>
+          <p:cNvPr id="19" name="tb"/>
+          <p:cNvSpPr/>
+          <p:nvPr/>
+        </p:nvSpPr>
+        <p:spPr>
+          <a:xfrm>
+            <a:off x="1262960" y="3340000"/>
+            <a:ext cx="5740000" cy="250000"/>
+          </a:xfrm>
+          <a:prstGeom prst="rect">
+            <a:avLst/>
+          </a:prstGeom>
+          <a:noFill/>
+        </p:spPr>
+        <p:txBody>
+          <a:bodyPr wrap="square" lIns="0" tIns="0" rIns="0" bIns="0" rtlCol="0" anchor="t"/>
+          <a:lstStyle/>
+          <a:p>
+            <a:pPr marL="0" indent="0" algn="l">
+              <a:buNone/>
+            </a:pPr>
+            <a:r>
+              <a:rPr lang="en-US" sz="1100" b="1" spc="280" kern="0" dirty="0">
+                <a:solidFill>
+                  <a:srgbClr val="C8A24A"/>
+                </a:solidFill>
+                <a:latin typeface="Calibri" pitchFamily="34" charset="0"/>
+                <a:cs typeface="Calibri" pitchFamily="34" charset="0"/>
+              </a:rPr>
+              <a:t>WHAT'S INCLUDED</a:t>
+            </a:r>
+          </a:p>
+        </p:txBody>
+      </p:sp>
+      <p:sp>
+        <p:nvSpPr>
+          <p:cNvPr id="20" name="r"/>
+          <p:cNvSpPr/>
+          <p:nvPr/>
+        </p:nvSpPr>
+        <p:spPr>
+          <a:xfrm>
+            <a:off x="7362960" y="3370000"/>
+            <a:ext cx="360000" cy="45720"/>
+          </a:xfrm>
+          <a:prstGeom prst="rect">
+            <a:avLst/>
+          </a:prstGeom>
+          <a:solidFill>
+            <a:srgbClr val="0F6E56"/>
+          </a:solidFill>
+        </p:spPr>
+        <p:txBody>
+          <a:bodyPr/>
+          <a:lstStyle/>
+          <a:p>
+            <a:endParaRPr lang="en-US"/>
+          </a:p>
+        </p:txBody>
+      </p:sp>
+      <p:sp>
+        <p:nvSpPr>
+          <p:cNvPr id="21" name="tb"/>
+          <p:cNvSpPr/>
+          <p:nvPr/>
+        </p:nvSpPr>
+        <p:spPr>
+          <a:xfrm>
+            <a:off x="7802960" y="3340000"/>
+            <a:ext cx="3566080" cy="250000"/>
+          </a:xfrm>
+          <a:prstGeom prst="rect">
+            <a:avLst/>
+          </a:prstGeom>
+          <a:noFill/>
+        </p:spPr>
+        <p:txBody>
+          <a:bodyPr wrap="square" lIns="0" tIns="0" rIns="0" bIns="0" rtlCol="0" anchor="t"/>
+          <a:lstStyle/>
+          <a:p>
+            <a:pPr marL="0" indent="0" algn="l">
+              <a:buNone/>
+            </a:pPr>
+            <a:r>
+              <a:rPr lang="en-US" sz="1100" b="1" spc="240" kern="0" dirty="0">
+                <a:solidFill>
+                  <a:srgbClr val="C8A24A"/>
+                </a:solidFill>
+                <a:latin typeface="Calibri" pitchFamily="34" charset="0"/>
+                <a:cs typeface="Calibri" pitchFamily="34" charset="0"/>
+              </a:rPr>
+              <a:t>WHY GUESTS LOVE IT</a:t>
+            </a:r>
+          </a:p>
+        </p:txBody>
+      </p:sp>
+      <p:sp>
+        <p:nvSpPr>
+          <p:cNvPr id="22" name="tb"/>
+          <p:cNvSpPr/>
+          <p:nvPr/>
+        </p:nvSpPr>
+        <p:spPr>
+          <a:xfrm>
+            <a:off x="822960" y="3670000"/>
+            <a:ext cx="6180000" cy="3000000"/>
+          </a:xfrm>
+          <a:prstGeom prst="rect">
+            <a:avLst/>
+          </a:prstGeom>
+          <a:noFill/>
+        </p:spPr>
+        <p:txBody>
+          <a:bodyPr wrap="square" lIns="0" tIns="0" rIns="0" bIns="0" rtlCol="0" anchor="t"/>
+          <a:lstStyle/>
+          <a:p>
+            <a:pPr marL="200000" indent="-200000" algn="l">
+              <a:lnSpc>
+                <a:spcPct val="100000"/>
+              </a:lnSpc>
+              <a:spcBef>
+                <a:spcPts val="400"/>
+              </a:spcBef>
+              <a:buClr>
+                <a:srgbClr val="0F6E56"/>
+              </a:buClr>
+              <a:buFont typeface="Arial"/>
+              <a:buChar char="▸"/>
+            </a:pPr>
+            <a:r>
+              <a:rPr lang="en-US" sz="1050" kern="0" dirty="0">
+                <a:solidFill>
+                  <a:srgbClr val="F2EEE6"/>
+                </a:solidFill>
+                <a:latin typeface="Calibri" pitchFamily="34" charset="0"/>
+                <a:cs typeface="Calibri" pitchFamily="34" charset="0"/>
+              </a:rPr>
+              <a:t>1-night stay, Standard Pond View Room</a:t>
+            </a:r>
+          </a:p>
+          <a:p>
+            <a:pPr marL="200000" indent="-200000" algn="l">
+              <a:lnSpc>
+                <a:spcPct val="100000"/>
+              </a:lnSpc>
+              <a:spcBef>
+                <a:spcPts val="400"/>
+              </a:spcBef>
+              <a:buClr>
+                <a:srgbClr val="0F6E56"/>
+              </a:buClr>
+              <a:buFont typeface="Arial"/>
+              <a:buChar char="▸"/>
+            </a:pPr>
+            <a:r>
+              <a:rPr lang="en-US" sz="1050" kern="0" dirty="0">
+                <a:solidFill>
+                  <a:srgbClr val="F2EEE6"/>
+                </a:solidFill>
+                <a:latin typeface="Calibri" pitchFamily="34" charset="0"/>
+                <a:cs typeface="Calibri" pitchFamily="34" charset="0"/>
+              </a:rPr>
+              <a:t>Daily breakfast for 2 at Warung Pak Lagoi</a:t>
+            </a:r>
+          </a:p>
+          <a:p>
+            <a:pPr marL="200000" indent="-200000" algn="l">
+              <a:lnSpc>
+                <a:spcPct val="100000"/>
+              </a:lnSpc>
+              <a:spcBef>
+                <a:spcPts val="400"/>
+              </a:spcBef>
+              <a:buClr>
+                <a:srgbClr val="0F6E56"/>
+              </a:buClr>
+              <a:buFont typeface="Arial"/>
+              <a:buChar char="▸"/>
+            </a:pPr>
+            <a:r>
+              <a:rPr lang="en-US" sz="1050" kern="0" dirty="0">
+                <a:solidFill>
+                  <a:srgbClr val="F2EEE6"/>
+                </a:solidFill>
+                <a:latin typeface="Calibri" pitchFamily="34" charset="0"/>
+                <a:cs typeface="Calibri" pitchFamily="34" charset="0"/>
+              </a:rPr>
+              <a:t>2-way return economy ferry by Bintan Resort Ferries</a:t>
+            </a:r>
+          </a:p>
+          <a:p>
+            <a:pPr marL="200000" indent="-200000" algn="l">
+              <a:lnSpc>
+                <a:spcPct val="100000"/>
+              </a:lnSpc>
+              <a:spcBef>
+                <a:spcPts val="400"/>
+              </a:spcBef>
+              <a:buClr>
+                <a:srgbClr val="0F6E56"/>
+              </a:buClr>
+              <a:buFont typeface="Arial"/>
+              <a:buChar char="▸"/>
+            </a:pPr>
+            <a:r>
+              <a:rPr lang="en-US" sz="1050" kern="0" dirty="0">
+                <a:solidFill>
+                  <a:srgbClr val="F2EEE6"/>
+                </a:solidFill>
+                <a:latin typeface="Calibri" pitchFamily="34" charset="0"/>
+                <a:cs typeface="Calibri" pitchFamily="34" charset="0"/>
+              </a:rPr>
+              <a:t>Shared hotel ↔ ferry terminal transfers</a:t>
+            </a:r>
+          </a:p>
+          <a:p>
+            <a:pPr marL="200000" indent="-200000" algn="l">
+              <a:lnSpc>
+                <a:spcPct val="100000"/>
+              </a:lnSpc>
+              <a:spcBef>
+                <a:spcPts val="400"/>
+              </a:spcBef>
+              <a:buClr>
+                <a:srgbClr val="0F6E56"/>
+              </a:buClr>
+              <a:buFont typeface="Arial"/>
+              <a:buChar char="▸"/>
+            </a:pPr>
+            <a:r>
+              <a:rPr lang="en-US" sz="1050" kern="0" dirty="0">
+                <a:solidFill>
+                  <a:srgbClr val="F2EEE6"/>
+                </a:solidFill>
+                <a:latin typeface="Calibri" pitchFamily="34" charset="0"/>
+                <a:cs typeface="Calibri" pitchFamily="34" charset="0"/>
+              </a:rPr>
+              <a:t>Welcome drink &amp; cold towel on arrival</a:t>
+            </a:r>
+          </a:p>
+          <a:p>
+            <a:pPr marL="200000" indent="-200000" algn="l">
+              <a:lnSpc>
+                <a:spcPct val="100000"/>
+              </a:lnSpc>
+              <a:spcBef>
+                <a:spcPts val="400"/>
+              </a:spcBef>
+              <a:buClr>
+                <a:srgbClr val="0F6E56"/>
+              </a:buClr>
+              <a:buFont typeface="Arial"/>
+              <a:buChar char="▸"/>
+            </a:pPr>
+            <a:r>
+              <a:rPr lang="en-US" sz="1050" kern="0" dirty="0">
+                <a:solidFill>
+                  <a:srgbClr val="F2EEE6"/>
+                </a:solidFill>
+                <a:latin typeface="Calibri" pitchFamily="34" charset="0"/>
+                <a:cs typeface="Calibri" pitchFamily="34" charset="0"/>
+              </a:rPr>
+              <a:t>Optional half-day tour — Blue Lake, Sand Dunes &amp; ATV</a:t>
+            </a:r>
+          </a:p>
+        </p:txBody>
+      </p:sp>
+      <p:sp>
+        <p:nvSpPr>
+          <p:cNvPr id="23" name="tb"/>
+          <p:cNvSpPr/>
+          <p:nvPr/>
+        </p:nvSpPr>
+        <p:spPr>
+          <a:xfrm>
+            <a:off x="7362960" y="3670000"/>
+            <a:ext cx="4006080" cy="3000000"/>
+          </a:xfrm>
+          <a:prstGeom prst="rect">
+            <a:avLst/>
+          </a:prstGeom>
+          <a:noFill/>
+        </p:spPr>
+        <p:txBody>
+          <a:bodyPr wrap="square" lIns="0" tIns="0" rIns="0" bIns="0" rtlCol="0" anchor="t"/>
+          <a:lstStyle/>
+          <a:p>
+            <a:pPr marL="0" indent="0" algn="l">
+              <a:lnSpc>
+                <a:spcPct val="100000"/>
+              </a:lnSpc>
+              <a:buNone/>
+            </a:pPr>
+            <a:r>
+              <a:rPr lang="en-US" sz="1100" b="1" kern="0" dirty="0">
+                <a:solidFill>
+                  <a:srgbClr val="F2EEE6"/>
+                </a:solidFill>
+                <a:latin typeface="Calibri" pitchFamily="34" charset="0"/>
+                <a:cs typeface="Calibri" pitchFamily="34" charset="0"/>
+              </a:rPr>
+              <a:t>Quick island getaway</a:t>
+            </a:r>
+          </a:p>
+          <a:p>
+            <a:pPr marL="0" indent="0" algn="l">
+              <a:lnSpc>
+                <a:spcPct val="100000"/>
+              </a:lnSpc>
+              <a:spcBef>
+                <a:spcPts val="120"/>
+              </a:spcBef>
+              <a:buNone/>
+            </a:pPr>
+            <a:r>
+              <a:rPr lang="en-US" sz="950" kern="0" dirty="0">
+                <a:solidFill>
+                  <a:srgbClr val="A7A296"/>
+                </a:solidFill>
+                <a:latin typeface="Calibri" pitchFamily="34" charset="0"/>
+                <a:cs typeface="Calibri" pitchFamily="34" charset="0"/>
+              </a:rPr>
+              <a:t>A short ferry hop from Singapore to the beach</a:t>
+            </a:r>
+          </a:p>
+          <a:p>
+            <a:pPr marL="0" indent="0" algn="l">
+              <a:lnSpc>
+                <a:spcPct val="100000"/>
+              </a:lnSpc>
+              <a:spcBef>
+                <a:spcPts val="600"/>
+              </a:spcBef>
+              <a:buNone/>
+            </a:pPr>
+            <a:r>
+              <a:rPr lang="en-US" sz="1100" b="1" kern="0" dirty="0">
+                <a:solidFill>
+                  <a:srgbClr val="F2EEE6"/>
+                </a:solidFill>
+                <a:latin typeface="Calibri" pitchFamily="34" charset="0"/>
+                <a:cs typeface="Calibri" pitchFamily="34" charset="0"/>
+              </a:rPr>
+              <a:t>Family-friendly</a:t>
+            </a:r>
+          </a:p>
+          <a:p>
+            <a:pPr marL="0" indent="0" algn="l">
+              <a:lnSpc>
+                <a:spcPct val="100000"/>
+              </a:lnSpc>
+              <a:spcBef>
+                <a:spcPts val="120"/>
+              </a:spcBef>
+              <a:buNone/>
+            </a:pPr>
+            <a:r>
+              <a:rPr lang="en-US" sz="950" kern="0" dirty="0">
+                <a:solidFill>
+                  <a:srgbClr val="A7A296"/>
+                </a:solidFill>
+                <a:latin typeface="Calibri" pitchFamily="34" charset="0"/>
+                <a:cs typeface="Calibri" pitchFamily="34" charset="0"/>
+              </a:rPr>
+              <a:t>Room fits 2 adults + 2 children under 11</a:t>
+            </a:r>
+          </a:p>
+          <a:p>
+            <a:pPr marL="0" indent="0" algn="l">
+              <a:lnSpc>
+                <a:spcPct val="100000"/>
+              </a:lnSpc>
+              <a:spcBef>
+                <a:spcPts val="600"/>
+              </a:spcBef>
+              <a:buNone/>
+            </a:pPr>
+            <a:r>
+              <a:rPr lang="en-US" sz="1100" b="1" kern="0" dirty="0">
+                <a:solidFill>
+                  <a:srgbClr val="F2EEE6"/>
+                </a:solidFill>
+                <a:latin typeface="Calibri" pitchFamily="34" charset="0"/>
+                <a:cs typeface="Calibri" pitchFamily="34" charset="0"/>
+              </a:rPr>
+              <a:t>Travel sorted</a:t>
+            </a:r>
+          </a:p>
+          <a:p>
+            <a:pPr marL="0" indent="0" algn="l">
+              <a:lnSpc>
+                <a:spcPct val="100000"/>
+              </a:lnSpc>
+              <a:spcBef>
+                <a:spcPts val="120"/>
+              </a:spcBef>
+              <a:buNone/>
+            </a:pPr>
+            <a:r>
+              <a:rPr lang="en-US" sz="950" kern="0" dirty="0">
+                <a:solidFill>
+                  <a:srgbClr val="A7A296"/>
+                </a:solidFill>
+                <a:latin typeface="Calibri" pitchFamily="34" charset="0"/>
+                <a:cs typeface="Calibri" pitchFamily="34" charset="0"/>
+              </a:rPr>
+              <a:t>Return ferry and shared transfers included</a:t>
+            </a:r>
+          </a:p>
+          <a:p>
+            <a:pPr marL="0" indent="0" algn="l">
+              <a:lnSpc>
+                <a:spcPct val="100000"/>
+              </a:lnSpc>
+              <a:spcBef>
+                <a:spcPts val="600"/>
+              </a:spcBef>
+              <a:buNone/>
+            </a:pPr>
+            <a:r>
+              <a:rPr lang="en-US" sz="1100" b="1" kern="0" dirty="0">
+                <a:solidFill>
+                  <a:srgbClr val="F2EEE6"/>
+                </a:solidFill>
+                <a:latin typeface="Calibri" pitchFamily="34" charset="0"/>
+                <a:cs typeface="Calibri" pitchFamily="34" charset="0"/>
+              </a:rPr>
+              <a:t>Add adventure</a:t>
+            </a:r>
+          </a:p>
+          <a:p>
+            <a:pPr marL="0" indent="0" algn="l">
+              <a:lnSpc>
+                <a:spcPct val="100000"/>
+              </a:lnSpc>
+              <a:spcBef>
+                <a:spcPts val="120"/>
+              </a:spcBef>
+              <a:buNone/>
+            </a:pPr>
+            <a:r>
+              <a:rPr lang="en-US" sz="950" kern="0" dirty="0">
+                <a:solidFill>
+                  <a:srgbClr val="A7A296"/>
+                </a:solidFill>
+                <a:latin typeface="Calibri" pitchFamily="34" charset="0"/>
+                <a:cs typeface="Calibri" pitchFamily="34" charset="0"/>
+              </a:rPr>
+              <a:t>Optional Blue Lake, Sand Dunes &amp; ATV day tour</a:t>
+            </a:r>
+          </a:p>
+        </p:txBody>
+      </p:sp>
+      <p:sp>
+        <p:nvSpPr>
+          <p:cNvPr id="24" name="tb"/>
+          <p:cNvSpPr/>
+          <p:nvPr/>
+        </p:nvSpPr>
+        <p:spPr>
+          <a:xfrm>
+            <a:off x="822960" y="6520000"/>
+            <a:ext cx="5400000" cy="240000"/>
+          </a:xfrm>
+          <a:prstGeom prst="rect">
+            <a:avLst/>
+          </a:prstGeom>
+          <a:noFill/>
+        </p:spPr>
+        <p:txBody>
+          <a:bodyPr wrap="square" lIns="0" tIns="0" rIns="0" bIns="0" rtlCol="0" anchor="t"/>
+          <a:lstStyle/>
+          <a:p>
+            <a:pPr marL="0" indent="0" algn="l">
+              <a:buNone/>
+            </a:pPr>
+            <a:r>
+              <a:rPr lang="en-US" sz="900" i="1" kern="0" dirty="0">
+                <a:solidFill>
+                  <a:srgbClr val="A7A296"/>
+                </a:solidFill>
+                <a:latin typeface="Calibri" pitchFamily="34" charset="0"/>
+                <a:cs typeface="Calibri" pitchFamily="34" charset="0"/>
+              </a:rPr>
+              <a:t>Pay with AsiaGO! Pass Credits  ·  AsiaGO Hotel Collection</a:t>
+            </a:r>
+          </a:p>
+        </p:txBody>
+      </p:sp>
+      <p:sp>
+        <p:nvSpPr>
+          <p:cNvPr id="25" name="tb"/>
+          <p:cNvSpPr/>
+          <p:nvPr/>
+        </p:nvSpPr>
+        <p:spPr>
+          <a:xfrm>
+            <a:off x="8369040" y="6520000"/>
+            <a:ext cx="3000000" cy="240000"/>
+          </a:xfrm>
+          <a:prstGeom prst="rect">
+            <a:avLst/>
+          </a:prstGeom>
+          <a:noFill/>
+        </p:spPr>
+        <p:txBody>
+          <a:bodyPr wrap="square" lIns="0" tIns="0" rIns="0" bIns="0" rtlCol="0" anchor="t"/>
+          <a:lstStyle/>
+          <a:p>
+            <a:pPr marL="0" indent="0" algn="r">
+              <a:buNone/>
+            </a:pPr>
+            <a:r>
+              <a:rPr lang="en-US" sz="950" b="1" spc="100" kern="0" dirty="0">
+                <a:solidFill>
+                  <a:srgbClr val="C8A24A"/>
+                </a:solidFill>
+                <a:latin typeface="Calibri" pitchFamily="34" charset="0"/>
+                <a:cs typeface="Calibri" pitchFamily="34" charset="0"/>
+              </a:rPr>
+              <a:t>AsiaGO! Pass</a:t>
+            </a:r>
+          </a:p>
+        </p:txBody>
+      </p:sp>
+      <p:sp>
+        <p:nvSpPr>
+          <p:cNvPr id="26" name="tb"/>
+          <p:cNvSpPr/>
+          <p:nvPr/>
+        </p:nvSpPr>
+        <p:spPr>
+          <a:xfrm>
+            <a:off x="7362960" y="6230000"/>
+            <a:ext cx="4006080" cy="360000"/>
+          </a:xfrm>
+          <a:prstGeom prst="rect">
+            <a:avLst/>
+          </a:prstGeom>
+          <a:noFill/>
+        </p:spPr>
+        <p:txBody>
+          <a:bodyPr wrap="square" lIns="0" tIns="0" rIns="0" bIns="0" rtlCol="0" anchor="t"/>
+          <a:lstStyle/>
+          <a:p>
+            <a:pPr marL="0" indent="0" algn="l">
+              <a:lnSpc>
+                <a:spcPct val="100000"/>
+              </a:lnSpc>
+              <a:buNone/>
+            </a:pPr>
+            <a:r>
+              <a:rPr lang="en-US" sz="850" i="1" kern="0" dirty="0">
+                <a:solidFill>
+                  <a:srgbClr val="E6CE8F"/>
+                </a:solidFill>
+                <a:latin typeface="Calibri" pitchFamily="34" charset="0"/>
+                <a:cs typeface="Calibri" pitchFamily="34" charset="0"/>
+              </a:rPr>
+              <a:t>Excludes visa on arrival, personal expenses &amp; additional meals.</a:t>
+            </a:r>
           </a:p>
         </p:txBody>
       </p:sp>
